--- a/reports/acdr2026_staff_deployment/進行シナリオ_0929/ACDR2026_進行スライド_Day2_案1007.pptx
+++ b/reports/acdr2026_staff_deployment/進行シナリオ_0929/ACDR2026_進行スライド_Day2_案1007.pptx
@@ -5891,7 +5891,7 @@
         </p:blipFill>
         <p:spPr>
           <a:xfrm>
-            <a:off x="5876474" y="292608"/>
+            <a:off x="5851278" y="292608"/>
             <a:ext cx="835472" cy="566928"/>
           </a:xfrm>
           <a:prstGeom prst="rect">
@@ -5915,7 +5915,7 @@
         </p:blipFill>
         <p:spPr>
           <a:xfrm>
-            <a:off x="6894827" y="292608"/>
+            <a:off x="6869630" y="292608"/>
             <a:ext cx="1598327" cy="566928"/>
           </a:xfrm>
           <a:prstGeom prst="rect">
@@ -5939,7 +5939,7 @@
         </p:blipFill>
         <p:spPr>
           <a:xfrm>
-            <a:off x="8676034" y="292608"/>
+            <a:off x="8650838" y="292608"/>
             <a:ext cx="1285036" cy="566928"/>
           </a:xfrm>
           <a:prstGeom prst="rect">
@@ -5963,8 +5963,8 @@
         </p:blipFill>
         <p:spPr>
           <a:xfrm>
-            <a:off x="10143951" y="292608"/>
-            <a:ext cx="554329" cy="566928"/>
+            <a:off x="10118754" y="292608"/>
+            <a:ext cx="579526" cy="566928"/>
           </a:xfrm>
           <a:prstGeom prst="rect">
             <a:avLst/>
@@ -6327,8 +6327,8 @@
         </p:nvSpPr>
         <p:spPr>
           <a:xfrm>
-            <a:off x="5711882" y="182880"/>
-            <a:ext cx="6202749" cy="786384"/>
+            <a:off x="5686686" y="182880"/>
+            <a:ext cx="6227945" cy="786384"/>
           </a:xfrm>
           <a:prstGeom prst="roundRect">
             <a:avLst>
@@ -6380,7 +6380,7 @@
         </p:blipFill>
         <p:spPr>
           <a:xfrm>
-            <a:off x="5876474" y="292608"/>
+            <a:off x="5851278" y="292608"/>
             <a:ext cx="835472" cy="566928"/>
           </a:xfrm>
           <a:prstGeom prst="rect">
@@ -6404,7 +6404,7 @@
         </p:blipFill>
         <p:spPr>
           <a:xfrm>
-            <a:off x="6894827" y="292608"/>
+            <a:off x="6869630" y="292608"/>
             <a:ext cx="1598327" cy="566928"/>
           </a:xfrm>
           <a:prstGeom prst="rect">
@@ -6428,7 +6428,7 @@
         </p:blipFill>
         <p:spPr>
           <a:xfrm>
-            <a:off x="8676034" y="292608"/>
+            <a:off x="8650838" y="292608"/>
             <a:ext cx="1285036" cy="566928"/>
           </a:xfrm>
           <a:prstGeom prst="rect">
@@ -6452,8 +6452,8 @@
         </p:blipFill>
         <p:spPr>
           <a:xfrm>
-            <a:off x="10143951" y="292608"/>
-            <a:ext cx="554329" cy="566928"/>
+            <a:off x="10118754" y="292608"/>
+            <a:ext cx="579526" cy="566928"/>
           </a:xfrm>
           <a:prstGeom prst="rect">
             <a:avLst/>
@@ -6686,8 +6686,8 @@
         </p:nvSpPr>
         <p:spPr>
           <a:xfrm>
-            <a:off x="5711882" y="182880"/>
-            <a:ext cx="6202749" cy="786384"/>
+            <a:off x="5686686" y="182880"/>
+            <a:ext cx="6227945" cy="786384"/>
           </a:xfrm>
           <a:prstGeom prst="roundRect">
             <a:avLst>
@@ -6739,7 +6739,7 @@
         </p:blipFill>
         <p:spPr>
           <a:xfrm>
-            <a:off x="5876474" y="292608"/>
+            <a:off x="5851278" y="292608"/>
             <a:ext cx="835472" cy="566928"/>
           </a:xfrm>
           <a:prstGeom prst="rect">
@@ -6763,7 +6763,7 @@
         </p:blipFill>
         <p:spPr>
           <a:xfrm>
-            <a:off x="6894827" y="292608"/>
+            <a:off x="6869630" y="292608"/>
             <a:ext cx="1598327" cy="566928"/>
           </a:xfrm>
           <a:prstGeom prst="rect">
@@ -6787,7 +6787,7 @@
         </p:blipFill>
         <p:spPr>
           <a:xfrm>
-            <a:off x="8676034" y="292608"/>
+            <a:off x="8650838" y="292608"/>
             <a:ext cx="1285036" cy="566928"/>
           </a:xfrm>
           <a:prstGeom prst="rect">
@@ -6811,8 +6811,8 @@
         </p:blipFill>
         <p:spPr>
           <a:xfrm>
-            <a:off x="10143951" y="292608"/>
-            <a:ext cx="554329" cy="566928"/>
+            <a:off x="10118754" y="292608"/>
+            <a:ext cx="579526" cy="566928"/>
           </a:xfrm>
           <a:prstGeom prst="rect">
             <a:avLst/>
@@ -7045,8 +7045,8 @@
         </p:nvSpPr>
         <p:spPr>
           <a:xfrm>
-            <a:off x="5711882" y="182880"/>
-            <a:ext cx="6202749" cy="786384"/>
+            <a:off x="5686686" y="182880"/>
+            <a:ext cx="6227945" cy="786384"/>
           </a:xfrm>
           <a:prstGeom prst="roundRect">
             <a:avLst>
@@ -7098,7 +7098,7 @@
         </p:blipFill>
         <p:spPr>
           <a:xfrm>
-            <a:off x="5876474" y="292608"/>
+            <a:off x="5851278" y="292608"/>
             <a:ext cx="835472" cy="566928"/>
           </a:xfrm>
           <a:prstGeom prst="rect">
@@ -7122,7 +7122,7 @@
         </p:blipFill>
         <p:spPr>
           <a:xfrm>
-            <a:off x="6894827" y="292608"/>
+            <a:off x="6869630" y="292608"/>
             <a:ext cx="1598327" cy="566928"/>
           </a:xfrm>
           <a:prstGeom prst="rect">
@@ -7146,7 +7146,7 @@
         </p:blipFill>
         <p:spPr>
           <a:xfrm>
-            <a:off x="8676034" y="292608"/>
+            <a:off x="8650838" y="292608"/>
             <a:ext cx="1285036" cy="566928"/>
           </a:xfrm>
           <a:prstGeom prst="rect">
@@ -7170,8 +7170,8 @@
         </p:blipFill>
         <p:spPr>
           <a:xfrm>
-            <a:off x="10143951" y="292608"/>
-            <a:ext cx="554329" cy="566928"/>
+            <a:off x="10118754" y="292608"/>
+            <a:ext cx="579526" cy="566928"/>
           </a:xfrm>
           <a:prstGeom prst="rect">
             <a:avLst/>
@@ -7404,8 +7404,8 @@
         </p:nvSpPr>
         <p:spPr>
           <a:xfrm>
-            <a:off x="5711882" y="182880"/>
-            <a:ext cx="6202749" cy="786384"/>
+            <a:off x="5686686" y="182880"/>
+            <a:ext cx="6227945" cy="786384"/>
           </a:xfrm>
           <a:prstGeom prst="roundRect">
             <a:avLst>
@@ -7457,7 +7457,7 @@
         </p:blipFill>
         <p:spPr>
           <a:xfrm>
-            <a:off x="5876474" y="292608"/>
+            <a:off x="5851278" y="292608"/>
             <a:ext cx="835472" cy="566928"/>
           </a:xfrm>
           <a:prstGeom prst="rect">
@@ -7481,7 +7481,7 @@
         </p:blipFill>
         <p:spPr>
           <a:xfrm>
-            <a:off x="6894827" y="292608"/>
+            <a:off x="6869630" y="292608"/>
             <a:ext cx="1598327" cy="566928"/>
           </a:xfrm>
           <a:prstGeom prst="rect">
@@ -7505,7 +7505,7 @@
         </p:blipFill>
         <p:spPr>
           <a:xfrm>
-            <a:off x="8676034" y="292608"/>
+            <a:off x="8650838" y="292608"/>
             <a:ext cx="1285036" cy="566928"/>
           </a:xfrm>
           <a:prstGeom prst="rect">
@@ -7529,8 +7529,8 @@
         </p:blipFill>
         <p:spPr>
           <a:xfrm>
-            <a:off x="10143951" y="292608"/>
-            <a:ext cx="554329" cy="566928"/>
+            <a:off x="10118754" y="292608"/>
+            <a:ext cx="579526" cy="566928"/>
           </a:xfrm>
           <a:prstGeom prst="rect">
             <a:avLst/>
@@ -7775,8 +7775,8 @@
         </p:nvSpPr>
         <p:spPr>
           <a:xfrm>
-            <a:off x="5711882" y="182880"/>
-            <a:ext cx="6202749" cy="786384"/>
+            <a:off x="5686686" y="182880"/>
+            <a:ext cx="6227945" cy="786384"/>
           </a:xfrm>
           <a:prstGeom prst="roundRect">
             <a:avLst>
@@ -7828,7 +7828,7 @@
         </p:blipFill>
         <p:spPr>
           <a:xfrm>
-            <a:off x="5876474" y="292608"/>
+            <a:off x="5851278" y="292608"/>
             <a:ext cx="835472" cy="566928"/>
           </a:xfrm>
           <a:prstGeom prst="rect">
@@ -7852,7 +7852,7 @@
         </p:blipFill>
         <p:spPr>
           <a:xfrm>
-            <a:off x="6894827" y="292608"/>
+            <a:off x="6869630" y="292608"/>
             <a:ext cx="1598327" cy="566928"/>
           </a:xfrm>
           <a:prstGeom prst="rect">
@@ -7876,7 +7876,7 @@
         </p:blipFill>
         <p:spPr>
           <a:xfrm>
-            <a:off x="8676034" y="292608"/>
+            <a:off x="8650838" y="292608"/>
             <a:ext cx="1285036" cy="566928"/>
           </a:xfrm>
           <a:prstGeom prst="rect">
@@ -7900,8 +7900,8 @@
         </p:blipFill>
         <p:spPr>
           <a:xfrm>
-            <a:off x="10143951" y="292608"/>
-            <a:ext cx="554329" cy="566928"/>
+            <a:off x="10118754" y="292608"/>
+            <a:ext cx="579526" cy="566928"/>
           </a:xfrm>
           <a:prstGeom prst="rect">
             <a:avLst/>
@@ -8313,8 +8313,8 @@
         </p:nvSpPr>
         <p:spPr>
           <a:xfrm>
-            <a:off x="5711882" y="182880"/>
-            <a:ext cx="6202749" cy="786384"/>
+            <a:off x="5686686" y="182880"/>
+            <a:ext cx="6227945" cy="786384"/>
           </a:xfrm>
           <a:prstGeom prst="roundRect">
             <a:avLst>
@@ -8366,7 +8366,7 @@
         </p:blipFill>
         <p:spPr>
           <a:xfrm>
-            <a:off x="5876474" y="292608"/>
+            <a:off x="5851278" y="292608"/>
             <a:ext cx="835472" cy="566928"/>
           </a:xfrm>
           <a:prstGeom prst="rect">
@@ -8390,7 +8390,7 @@
         </p:blipFill>
         <p:spPr>
           <a:xfrm>
-            <a:off x="6894827" y="292608"/>
+            <a:off x="6869630" y="292608"/>
             <a:ext cx="1598327" cy="566928"/>
           </a:xfrm>
           <a:prstGeom prst="rect">
@@ -8414,7 +8414,7 @@
         </p:blipFill>
         <p:spPr>
           <a:xfrm>
-            <a:off x="8676034" y="292608"/>
+            <a:off x="8650838" y="292608"/>
             <a:ext cx="1285036" cy="566928"/>
           </a:xfrm>
           <a:prstGeom prst="rect">
@@ -8438,8 +8438,8 @@
         </p:blipFill>
         <p:spPr>
           <a:xfrm>
-            <a:off x="10143951" y="292608"/>
-            <a:ext cx="554329" cy="566928"/>
+            <a:off x="10118754" y="292608"/>
+            <a:ext cx="579526" cy="566928"/>
           </a:xfrm>
           <a:prstGeom prst="rect">
             <a:avLst/>
@@ -8707,8 +8707,8 @@
         </p:nvSpPr>
         <p:spPr>
           <a:xfrm>
-            <a:off x="5711882" y="182880"/>
-            <a:ext cx="6202749" cy="786384"/>
+            <a:off x="5686686" y="182880"/>
+            <a:ext cx="6227945" cy="786384"/>
           </a:xfrm>
           <a:prstGeom prst="roundRect">
             <a:avLst>
@@ -8760,7 +8760,7 @@
         </p:blipFill>
         <p:spPr>
           <a:xfrm>
-            <a:off x="5876474" y="292608"/>
+            <a:off x="5851278" y="292608"/>
             <a:ext cx="835472" cy="566928"/>
           </a:xfrm>
           <a:prstGeom prst="rect">
@@ -8784,7 +8784,7 @@
         </p:blipFill>
         <p:spPr>
           <a:xfrm>
-            <a:off x="6894827" y="292608"/>
+            <a:off x="6869630" y="292608"/>
             <a:ext cx="1598327" cy="566928"/>
           </a:xfrm>
           <a:prstGeom prst="rect">
@@ -8808,7 +8808,7 @@
         </p:blipFill>
         <p:spPr>
           <a:xfrm>
-            <a:off x="8676034" y="292608"/>
+            <a:off x="8650838" y="292608"/>
             <a:ext cx="1285036" cy="566928"/>
           </a:xfrm>
           <a:prstGeom prst="rect">
@@ -8832,8 +8832,8 @@
         </p:blipFill>
         <p:spPr>
           <a:xfrm>
-            <a:off x="10143951" y="292608"/>
-            <a:ext cx="554329" cy="566928"/>
+            <a:off x="10118754" y="292608"/>
+            <a:ext cx="579526" cy="566928"/>
           </a:xfrm>
           <a:prstGeom prst="rect">
             <a:avLst/>
@@ -9101,8 +9101,8 @@
         </p:nvSpPr>
         <p:spPr>
           <a:xfrm>
-            <a:off x="5711882" y="182880"/>
-            <a:ext cx="6202749" cy="786384"/>
+            <a:off x="5686686" y="182880"/>
+            <a:ext cx="6227945" cy="786384"/>
           </a:xfrm>
           <a:prstGeom prst="roundRect">
             <a:avLst>
@@ -9154,7 +9154,7 @@
         </p:blipFill>
         <p:spPr>
           <a:xfrm>
-            <a:off x="5876474" y="292608"/>
+            <a:off x="5851278" y="292608"/>
             <a:ext cx="835472" cy="566928"/>
           </a:xfrm>
           <a:prstGeom prst="rect">
@@ -9178,7 +9178,7 @@
         </p:blipFill>
         <p:spPr>
           <a:xfrm>
-            <a:off x="6894827" y="292608"/>
+            <a:off x="6869630" y="292608"/>
             <a:ext cx="1598327" cy="566928"/>
           </a:xfrm>
           <a:prstGeom prst="rect">
@@ -9202,7 +9202,7 @@
         </p:blipFill>
         <p:spPr>
           <a:xfrm>
-            <a:off x="8676034" y="292608"/>
+            <a:off x="8650838" y="292608"/>
             <a:ext cx="1285036" cy="566928"/>
           </a:xfrm>
           <a:prstGeom prst="rect">
@@ -9226,8 +9226,8 @@
         </p:blipFill>
         <p:spPr>
           <a:xfrm>
-            <a:off x="10143951" y="292608"/>
-            <a:ext cx="554329" cy="566928"/>
+            <a:off x="10118754" y="292608"/>
+            <a:ext cx="579526" cy="566928"/>
           </a:xfrm>
           <a:prstGeom prst="rect">
             <a:avLst/>
@@ -9507,8 +9507,8 @@
         </p:nvSpPr>
         <p:spPr>
           <a:xfrm>
-            <a:off x="5711882" y="182880"/>
-            <a:ext cx="6202749" cy="786384"/>
+            <a:off x="5686686" y="182880"/>
+            <a:ext cx="6227945" cy="786384"/>
           </a:xfrm>
           <a:prstGeom prst="roundRect">
             <a:avLst>
@@ -9560,7 +9560,7 @@
         </p:blipFill>
         <p:spPr>
           <a:xfrm>
-            <a:off x="5876474" y="292608"/>
+            <a:off x="5851278" y="292608"/>
             <a:ext cx="835472" cy="566928"/>
           </a:xfrm>
           <a:prstGeom prst="rect">
@@ -9584,7 +9584,7 @@
         </p:blipFill>
         <p:spPr>
           <a:xfrm>
-            <a:off x="6894827" y="292608"/>
+            <a:off x="6869630" y="292608"/>
             <a:ext cx="1598327" cy="566928"/>
           </a:xfrm>
           <a:prstGeom prst="rect">
@@ -9608,7 +9608,7 @@
         </p:blipFill>
         <p:spPr>
           <a:xfrm>
-            <a:off x="8676034" y="292608"/>
+            <a:off x="8650838" y="292608"/>
             <a:ext cx="1285036" cy="566928"/>
           </a:xfrm>
           <a:prstGeom prst="rect">
@@ -9632,8 +9632,8 @@
         </p:blipFill>
         <p:spPr>
           <a:xfrm>
-            <a:off x="10143951" y="292608"/>
-            <a:ext cx="554329" cy="566928"/>
+            <a:off x="10118754" y="292608"/>
+            <a:ext cx="579526" cy="566928"/>
           </a:xfrm>
           <a:prstGeom prst="rect">
             <a:avLst/>
@@ -9913,8 +9913,8 @@
         </p:nvSpPr>
         <p:spPr>
           <a:xfrm>
-            <a:off x="5711882" y="182880"/>
-            <a:ext cx="6202749" cy="786384"/>
+            <a:off x="5686686" y="182880"/>
+            <a:ext cx="6227945" cy="786384"/>
           </a:xfrm>
           <a:prstGeom prst="roundRect">
             <a:avLst>
@@ -9966,7 +9966,7 @@
         </p:blipFill>
         <p:spPr>
           <a:xfrm>
-            <a:off x="5876474" y="292608"/>
+            <a:off x="5851278" y="292608"/>
             <a:ext cx="835472" cy="566928"/>
           </a:xfrm>
           <a:prstGeom prst="rect">
@@ -9990,7 +9990,7 @@
         </p:blipFill>
         <p:spPr>
           <a:xfrm>
-            <a:off x="6894827" y="292608"/>
+            <a:off x="6869630" y="292608"/>
             <a:ext cx="1598327" cy="566928"/>
           </a:xfrm>
           <a:prstGeom prst="rect">
@@ -10014,7 +10014,7 @@
         </p:blipFill>
         <p:spPr>
           <a:xfrm>
-            <a:off x="8676034" y="292608"/>
+            <a:off x="8650838" y="292608"/>
             <a:ext cx="1285036" cy="566928"/>
           </a:xfrm>
           <a:prstGeom prst="rect">
@@ -10038,8 +10038,8 @@
         </p:blipFill>
         <p:spPr>
           <a:xfrm>
-            <a:off x="10143951" y="292608"/>
-            <a:ext cx="554329" cy="566928"/>
+            <a:off x="10118754" y="292608"/>
+            <a:ext cx="579526" cy="566928"/>
           </a:xfrm>
           <a:prstGeom prst="rect">
             <a:avLst/>
@@ -10319,8 +10319,8 @@
         </p:nvSpPr>
         <p:spPr>
           <a:xfrm>
-            <a:off x="5711882" y="182880"/>
-            <a:ext cx="6202749" cy="786384"/>
+            <a:off x="5686686" y="182880"/>
+            <a:ext cx="6227945" cy="786384"/>
           </a:xfrm>
           <a:prstGeom prst="roundRect">
             <a:avLst>
@@ -10372,7 +10372,7 @@
         </p:blipFill>
         <p:spPr>
           <a:xfrm>
-            <a:off x="5876474" y="292608"/>
+            <a:off x="5851278" y="292608"/>
             <a:ext cx="835472" cy="566928"/>
           </a:xfrm>
           <a:prstGeom prst="rect">
@@ -10396,7 +10396,7 @@
         </p:blipFill>
         <p:spPr>
           <a:xfrm>
-            <a:off x="6894827" y="292608"/>
+            <a:off x="6869630" y="292608"/>
             <a:ext cx="1598327" cy="566928"/>
           </a:xfrm>
           <a:prstGeom prst="rect">
@@ -10420,7 +10420,7 @@
         </p:blipFill>
         <p:spPr>
           <a:xfrm>
-            <a:off x="8676034" y="292608"/>
+            <a:off x="8650838" y="292608"/>
             <a:ext cx="1285036" cy="566928"/>
           </a:xfrm>
           <a:prstGeom prst="rect">
@@ -10444,8 +10444,8 @@
         </p:blipFill>
         <p:spPr>
           <a:xfrm>
-            <a:off x="10143951" y="292608"/>
-            <a:ext cx="554329" cy="566928"/>
+            <a:off x="10118754" y="292608"/>
+            <a:ext cx="579526" cy="566928"/>
           </a:xfrm>
           <a:prstGeom prst="rect">
             <a:avLst/>
@@ -10863,8 +10863,8 @@
         </p:nvSpPr>
         <p:spPr>
           <a:xfrm>
-            <a:off x="5711882" y="182880"/>
-            <a:ext cx="6202749" cy="786384"/>
+            <a:off x="5686686" y="182880"/>
+            <a:ext cx="6227945" cy="786384"/>
           </a:xfrm>
           <a:prstGeom prst="roundRect">
             <a:avLst>
@@ -10916,7 +10916,7 @@
         </p:blipFill>
         <p:spPr>
           <a:xfrm>
-            <a:off x="5876474" y="292608"/>
+            <a:off x="5851278" y="292608"/>
             <a:ext cx="835472" cy="566928"/>
           </a:xfrm>
           <a:prstGeom prst="rect">
@@ -10940,7 +10940,7 @@
         </p:blipFill>
         <p:spPr>
           <a:xfrm>
-            <a:off x="6894827" y="292608"/>
+            <a:off x="6869630" y="292608"/>
             <a:ext cx="1598327" cy="566928"/>
           </a:xfrm>
           <a:prstGeom prst="rect">
@@ -10964,7 +10964,7 @@
         </p:blipFill>
         <p:spPr>
           <a:xfrm>
-            <a:off x="8676034" y="292608"/>
+            <a:off x="8650838" y="292608"/>
             <a:ext cx="1285036" cy="566928"/>
           </a:xfrm>
           <a:prstGeom prst="rect">
@@ -10988,8 +10988,8 @@
         </p:blipFill>
         <p:spPr>
           <a:xfrm>
-            <a:off x="10143951" y="292608"/>
-            <a:ext cx="554329" cy="566928"/>
+            <a:off x="10118754" y="292608"/>
+            <a:ext cx="579526" cy="566928"/>
           </a:xfrm>
           <a:prstGeom prst="rect">
             <a:avLst/>
@@ -11257,8 +11257,8 @@
         </p:nvSpPr>
         <p:spPr>
           <a:xfrm>
-            <a:off x="5711882" y="182880"/>
-            <a:ext cx="6202749" cy="786384"/>
+            <a:off x="5686686" y="182880"/>
+            <a:ext cx="6227945" cy="786384"/>
           </a:xfrm>
           <a:prstGeom prst="roundRect">
             <a:avLst>
@@ -11310,7 +11310,7 @@
         </p:blipFill>
         <p:spPr>
           <a:xfrm>
-            <a:off x="5876474" y="292608"/>
+            <a:off x="5851278" y="292608"/>
             <a:ext cx="835472" cy="566928"/>
           </a:xfrm>
           <a:prstGeom prst="rect">
@@ -11334,7 +11334,7 @@
         </p:blipFill>
         <p:spPr>
           <a:xfrm>
-            <a:off x="6894827" y="292608"/>
+            <a:off x="6869630" y="292608"/>
             <a:ext cx="1598327" cy="566928"/>
           </a:xfrm>
           <a:prstGeom prst="rect">
@@ -11358,7 +11358,7 @@
         </p:blipFill>
         <p:spPr>
           <a:xfrm>
-            <a:off x="8676034" y="292608"/>
+            <a:off x="8650838" y="292608"/>
             <a:ext cx="1285036" cy="566928"/>
           </a:xfrm>
           <a:prstGeom prst="rect">
@@ -11382,8 +11382,8 @@
         </p:blipFill>
         <p:spPr>
           <a:xfrm>
-            <a:off x="10143951" y="292608"/>
-            <a:ext cx="554329" cy="566928"/>
+            <a:off x="10118754" y="292608"/>
+            <a:ext cx="579526" cy="566928"/>
           </a:xfrm>
           <a:prstGeom prst="rect">
             <a:avLst/>
@@ -11640,8 +11640,8 @@
         </p:nvSpPr>
         <p:spPr>
           <a:xfrm>
-            <a:off x="5711882" y="182880"/>
-            <a:ext cx="6202749" cy="786384"/>
+            <a:off x="5686686" y="182880"/>
+            <a:ext cx="6227945" cy="786384"/>
           </a:xfrm>
           <a:prstGeom prst="roundRect">
             <a:avLst>
@@ -11693,7 +11693,7 @@
         </p:blipFill>
         <p:spPr>
           <a:xfrm>
-            <a:off x="5876474" y="292608"/>
+            <a:off x="5851278" y="292608"/>
             <a:ext cx="835472" cy="566928"/>
           </a:xfrm>
           <a:prstGeom prst="rect">
@@ -11717,7 +11717,7 @@
         </p:blipFill>
         <p:spPr>
           <a:xfrm>
-            <a:off x="6894827" y="292608"/>
+            <a:off x="6869630" y="292608"/>
             <a:ext cx="1598327" cy="566928"/>
           </a:xfrm>
           <a:prstGeom prst="rect">
@@ -11741,7 +11741,7 @@
         </p:blipFill>
         <p:spPr>
           <a:xfrm>
-            <a:off x="8676034" y="292608"/>
+            <a:off x="8650838" y="292608"/>
             <a:ext cx="1285036" cy="566928"/>
           </a:xfrm>
           <a:prstGeom prst="rect">
@@ -11765,8 +11765,8 @@
         </p:blipFill>
         <p:spPr>
           <a:xfrm>
-            <a:off x="10143951" y="292608"/>
-            <a:ext cx="554329" cy="566928"/>
+            <a:off x="10118754" y="292608"/>
+            <a:ext cx="579526" cy="566928"/>
           </a:xfrm>
           <a:prstGeom prst="rect">
             <a:avLst/>
@@ -12034,8 +12034,8 @@
         </p:nvSpPr>
         <p:spPr>
           <a:xfrm>
-            <a:off x="5711882" y="182880"/>
-            <a:ext cx="6202749" cy="786384"/>
+            <a:off x="5686686" y="182880"/>
+            <a:ext cx="6227945" cy="786384"/>
           </a:xfrm>
           <a:prstGeom prst="roundRect">
             <a:avLst>
@@ -12087,7 +12087,7 @@
         </p:blipFill>
         <p:spPr>
           <a:xfrm>
-            <a:off x="5876474" y="292608"/>
+            <a:off x="5851278" y="292608"/>
             <a:ext cx="835472" cy="566928"/>
           </a:xfrm>
           <a:prstGeom prst="rect">
@@ -12111,7 +12111,7 @@
         </p:blipFill>
         <p:spPr>
           <a:xfrm>
-            <a:off x="6894827" y="292608"/>
+            <a:off x="6869630" y="292608"/>
             <a:ext cx="1598327" cy="566928"/>
           </a:xfrm>
           <a:prstGeom prst="rect">
@@ -12135,7 +12135,7 @@
         </p:blipFill>
         <p:spPr>
           <a:xfrm>
-            <a:off x="8676034" y="292608"/>
+            <a:off x="8650838" y="292608"/>
             <a:ext cx="1285036" cy="566928"/>
           </a:xfrm>
           <a:prstGeom prst="rect">
@@ -12159,8 +12159,8 @@
         </p:blipFill>
         <p:spPr>
           <a:xfrm>
-            <a:off x="10143951" y="292608"/>
-            <a:ext cx="554329" cy="566928"/>
+            <a:off x="10118754" y="292608"/>
+            <a:ext cx="579526" cy="566928"/>
           </a:xfrm>
           <a:prstGeom prst="rect">
             <a:avLst/>
@@ -12428,8 +12428,8 @@
         </p:nvSpPr>
         <p:spPr>
           <a:xfrm>
-            <a:off x="5711882" y="182880"/>
-            <a:ext cx="6202749" cy="786384"/>
+            <a:off x="5686686" y="182880"/>
+            <a:ext cx="6227945" cy="786384"/>
           </a:xfrm>
           <a:prstGeom prst="roundRect">
             <a:avLst>
@@ -12481,7 +12481,7 @@
         </p:blipFill>
         <p:spPr>
           <a:xfrm>
-            <a:off x="5876474" y="292608"/>
+            <a:off x="5851278" y="292608"/>
             <a:ext cx="835472" cy="566928"/>
           </a:xfrm>
           <a:prstGeom prst="rect">
@@ -12505,7 +12505,7 @@
         </p:blipFill>
         <p:spPr>
           <a:xfrm>
-            <a:off x="6894827" y="292608"/>
+            <a:off x="6869630" y="292608"/>
             <a:ext cx="1598327" cy="566928"/>
           </a:xfrm>
           <a:prstGeom prst="rect">
@@ -12529,7 +12529,7 @@
         </p:blipFill>
         <p:spPr>
           <a:xfrm>
-            <a:off x="8676034" y="292608"/>
+            <a:off x="8650838" y="292608"/>
             <a:ext cx="1285036" cy="566928"/>
           </a:xfrm>
           <a:prstGeom prst="rect">
@@ -12553,8 +12553,8 @@
         </p:blipFill>
         <p:spPr>
           <a:xfrm>
-            <a:off x="10143951" y="292608"/>
-            <a:ext cx="554329" cy="566928"/>
+            <a:off x="10118754" y="292608"/>
+            <a:ext cx="579526" cy="566928"/>
           </a:xfrm>
           <a:prstGeom prst="rect">
             <a:avLst/>
@@ -12822,8 +12822,8 @@
         </p:nvSpPr>
         <p:spPr>
           <a:xfrm>
-            <a:off x="5711882" y="182880"/>
-            <a:ext cx="6202749" cy="786384"/>
+            <a:off x="5686686" y="182880"/>
+            <a:ext cx="6227945" cy="786384"/>
           </a:xfrm>
           <a:prstGeom prst="roundRect">
             <a:avLst>
@@ -12875,7 +12875,7 @@
         </p:blipFill>
         <p:spPr>
           <a:xfrm>
-            <a:off x="5876474" y="292608"/>
+            <a:off x="5851278" y="292608"/>
             <a:ext cx="835472" cy="566928"/>
           </a:xfrm>
           <a:prstGeom prst="rect">
@@ -12899,7 +12899,7 @@
         </p:blipFill>
         <p:spPr>
           <a:xfrm>
-            <a:off x="6894827" y="292608"/>
+            <a:off x="6869630" y="292608"/>
             <a:ext cx="1598327" cy="566928"/>
           </a:xfrm>
           <a:prstGeom prst="rect">
@@ -12923,7 +12923,7 @@
         </p:blipFill>
         <p:spPr>
           <a:xfrm>
-            <a:off x="8676034" y="292608"/>
+            <a:off x="8650838" y="292608"/>
             <a:ext cx="1285036" cy="566928"/>
           </a:xfrm>
           <a:prstGeom prst="rect">
@@ -12947,8 +12947,8 @@
         </p:blipFill>
         <p:spPr>
           <a:xfrm>
-            <a:off x="10143951" y="292608"/>
-            <a:ext cx="554329" cy="566928"/>
+            <a:off x="10118754" y="292608"/>
+            <a:ext cx="579526" cy="566928"/>
           </a:xfrm>
           <a:prstGeom prst="rect">
             <a:avLst/>
@@ -13193,8 +13193,8 @@
         </p:nvSpPr>
         <p:spPr>
           <a:xfrm>
-            <a:off x="5711882" y="182880"/>
-            <a:ext cx="6202749" cy="786384"/>
+            <a:off x="5686686" y="182880"/>
+            <a:ext cx="6227945" cy="786384"/>
           </a:xfrm>
           <a:prstGeom prst="roundRect">
             <a:avLst>
@@ -13246,7 +13246,7 @@
         </p:blipFill>
         <p:spPr>
           <a:xfrm>
-            <a:off x="5876474" y="292608"/>
+            <a:off x="5851278" y="292608"/>
             <a:ext cx="835472" cy="566928"/>
           </a:xfrm>
           <a:prstGeom prst="rect">
@@ -13270,7 +13270,7 @@
         </p:blipFill>
         <p:spPr>
           <a:xfrm>
-            <a:off x="6894827" y="292608"/>
+            <a:off x="6869630" y="292608"/>
             <a:ext cx="1598327" cy="566928"/>
           </a:xfrm>
           <a:prstGeom prst="rect">
@@ -13294,7 +13294,7 @@
         </p:blipFill>
         <p:spPr>
           <a:xfrm>
-            <a:off x="8676034" y="292608"/>
+            <a:off x="8650838" y="292608"/>
             <a:ext cx="1285036" cy="566928"/>
           </a:xfrm>
           <a:prstGeom prst="rect">
@@ -13318,8 +13318,8 @@
         </p:blipFill>
         <p:spPr>
           <a:xfrm>
-            <a:off x="10143951" y="292608"/>
-            <a:ext cx="554329" cy="566928"/>
+            <a:off x="10118754" y="292608"/>
+            <a:ext cx="579526" cy="566928"/>
           </a:xfrm>
           <a:prstGeom prst="rect">
             <a:avLst/>
@@ -13478,7 +13478,7 @@
         </p:blipFill>
         <p:spPr>
           <a:xfrm>
-            <a:off x="5876474" y="292608"/>
+            <a:off x="5851278" y="292608"/>
             <a:ext cx="835472" cy="566928"/>
           </a:xfrm>
           <a:prstGeom prst="rect">
@@ -13502,7 +13502,7 @@
         </p:blipFill>
         <p:spPr>
           <a:xfrm>
-            <a:off x="6894827" y="292608"/>
+            <a:off x="6869630" y="292608"/>
             <a:ext cx="1598327" cy="566928"/>
           </a:xfrm>
           <a:prstGeom prst="rect">
@@ -13526,7 +13526,7 @@
         </p:blipFill>
         <p:spPr>
           <a:xfrm>
-            <a:off x="8676034" y="292608"/>
+            <a:off x="8650838" y="292608"/>
             <a:ext cx="1285036" cy="566928"/>
           </a:xfrm>
           <a:prstGeom prst="rect">
@@ -13550,8 +13550,8 @@
         </p:blipFill>
         <p:spPr>
           <a:xfrm>
-            <a:off x="10143951" y="292608"/>
-            <a:ext cx="554329" cy="566928"/>
+            <a:off x="10118754" y="292608"/>
+            <a:ext cx="579526" cy="566928"/>
           </a:xfrm>
           <a:prstGeom prst="rect">
             <a:avLst/>
@@ -13914,8 +13914,8 @@
         </p:nvSpPr>
         <p:spPr>
           <a:xfrm>
-            <a:off x="5711882" y="182880"/>
-            <a:ext cx="6202749" cy="786384"/>
+            <a:off x="5686686" y="182880"/>
+            <a:ext cx="6227945" cy="786384"/>
           </a:xfrm>
           <a:prstGeom prst="roundRect">
             <a:avLst>
@@ -13967,7 +13967,7 @@
         </p:blipFill>
         <p:spPr>
           <a:xfrm>
-            <a:off x="5876474" y="292608"/>
+            <a:off x="5851278" y="292608"/>
             <a:ext cx="835472" cy="566928"/>
           </a:xfrm>
           <a:prstGeom prst="rect">
@@ -13991,7 +13991,7 @@
         </p:blipFill>
         <p:spPr>
           <a:xfrm>
-            <a:off x="6894827" y="292608"/>
+            <a:off x="6869630" y="292608"/>
             <a:ext cx="1598327" cy="566928"/>
           </a:xfrm>
           <a:prstGeom prst="rect">
@@ -14015,7 +14015,7 @@
         </p:blipFill>
         <p:spPr>
           <a:xfrm>
-            <a:off x="8676034" y="292608"/>
+            <a:off x="8650838" y="292608"/>
             <a:ext cx="1285036" cy="566928"/>
           </a:xfrm>
           <a:prstGeom prst="rect">
@@ -14039,8 +14039,8 @@
         </p:blipFill>
         <p:spPr>
           <a:xfrm>
-            <a:off x="10143951" y="292608"/>
-            <a:ext cx="554329" cy="566928"/>
+            <a:off x="10118754" y="292608"/>
+            <a:ext cx="579526" cy="566928"/>
           </a:xfrm>
           <a:prstGeom prst="rect">
             <a:avLst/>
@@ -14297,8 +14297,8 @@
         </p:nvSpPr>
         <p:spPr>
           <a:xfrm>
-            <a:off x="5711882" y="182880"/>
-            <a:ext cx="6202749" cy="786384"/>
+            <a:off x="5686686" y="182880"/>
+            <a:ext cx="6227945" cy="786384"/>
           </a:xfrm>
           <a:prstGeom prst="roundRect">
             <a:avLst>
@@ -14350,7 +14350,7 @@
         </p:blipFill>
         <p:spPr>
           <a:xfrm>
-            <a:off x="5876474" y="292608"/>
+            <a:off x="5851278" y="292608"/>
             <a:ext cx="835472" cy="566928"/>
           </a:xfrm>
           <a:prstGeom prst="rect">
@@ -14374,7 +14374,7 @@
         </p:blipFill>
         <p:spPr>
           <a:xfrm>
-            <a:off x="6894827" y="292608"/>
+            <a:off x="6869630" y="292608"/>
             <a:ext cx="1598327" cy="566928"/>
           </a:xfrm>
           <a:prstGeom prst="rect">
@@ -14398,7 +14398,7 @@
         </p:blipFill>
         <p:spPr>
           <a:xfrm>
-            <a:off x="8676034" y="292608"/>
+            <a:off x="8650838" y="292608"/>
             <a:ext cx="1285036" cy="566928"/>
           </a:xfrm>
           <a:prstGeom prst="rect">
@@ -14422,8 +14422,8 @@
         </p:blipFill>
         <p:spPr>
           <a:xfrm>
-            <a:off x="10143951" y="292608"/>
-            <a:ext cx="554329" cy="566928"/>
+            <a:off x="10118754" y="292608"/>
+            <a:ext cx="579526" cy="566928"/>
           </a:xfrm>
           <a:prstGeom prst="rect">
             <a:avLst/>
@@ -14703,8 +14703,8 @@
         </p:nvSpPr>
         <p:spPr>
           <a:xfrm>
-            <a:off x="5711882" y="182880"/>
-            <a:ext cx="6202749" cy="786384"/>
+            <a:off x="5686686" y="182880"/>
+            <a:ext cx="6227945" cy="786384"/>
           </a:xfrm>
           <a:prstGeom prst="roundRect">
             <a:avLst>
@@ -14756,7 +14756,7 @@
         </p:blipFill>
         <p:spPr>
           <a:xfrm>
-            <a:off x="5876474" y="292608"/>
+            <a:off x="5851278" y="292608"/>
             <a:ext cx="835472" cy="566928"/>
           </a:xfrm>
           <a:prstGeom prst="rect">
@@ -14780,7 +14780,7 @@
         </p:blipFill>
         <p:spPr>
           <a:xfrm>
-            <a:off x="6894827" y="292608"/>
+            <a:off x="6869630" y="292608"/>
             <a:ext cx="1598327" cy="566928"/>
           </a:xfrm>
           <a:prstGeom prst="rect">
@@ -14804,7 +14804,7 @@
         </p:blipFill>
         <p:spPr>
           <a:xfrm>
-            <a:off x="8676034" y="292608"/>
+            <a:off x="8650838" y="292608"/>
             <a:ext cx="1285036" cy="566928"/>
           </a:xfrm>
           <a:prstGeom prst="rect">
@@ -14828,8 +14828,8 @@
         </p:blipFill>
         <p:spPr>
           <a:xfrm>
-            <a:off x="10143951" y="292608"/>
-            <a:ext cx="554329" cy="566928"/>
+            <a:off x="10118754" y="292608"/>
+            <a:ext cx="579526" cy="566928"/>
           </a:xfrm>
           <a:prstGeom prst="rect">
             <a:avLst/>
@@ -15074,8 +15074,8 @@
         </p:nvSpPr>
         <p:spPr>
           <a:xfrm>
-            <a:off x="5711882" y="182880"/>
-            <a:ext cx="6202749" cy="786384"/>
+            <a:off x="5686686" y="182880"/>
+            <a:ext cx="6227945" cy="786384"/>
           </a:xfrm>
           <a:prstGeom prst="roundRect">
             <a:avLst>
@@ -15127,7 +15127,7 @@
         </p:blipFill>
         <p:spPr>
           <a:xfrm>
-            <a:off x="5876474" y="292608"/>
+            <a:off x="5851278" y="292608"/>
             <a:ext cx="835472" cy="566928"/>
           </a:xfrm>
           <a:prstGeom prst="rect">
@@ -15151,7 +15151,7 @@
         </p:blipFill>
         <p:spPr>
           <a:xfrm>
-            <a:off x="6894827" y="292608"/>
+            <a:off x="6869630" y="292608"/>
             <a:ext cx="1598327" cy="566928"/>
           </a:xfrm>
           <a:prstGeom prst="rect">
@@ -15175,7 +15175,7 @@
         </p:blipFill>
         <p:spPr>
           <a:xfrm>
-            <a:off x="8676034" y="292608"/>
+            <a:off x="8650838" y="292608"/>
             <a:ext cx="1285036" cy="566928"/>
           </a:xfrm>
           <a:prstGeom prst="rect">
@@ -15199,8 +15199,8 @@
         </p:blipFill>
         <p:spPr>
           <a:xfrm>
-            <a:off x="10143951" y="292608"/>
-            <a:ext cx="554329" cy="566928"/>
+            <a:off x="10118754" y="292608"/>
+            <a:ext cx="579526" cy="566928"/>
           </a:xfrm>
           <a:prstGeom prst="rect">
             <a:avLst/>
@@ -15480,8 +15480,8 @@
         </p:nvSpPr>
         <p:spPr>
           <a:xfrm>
-            <a:off x="5711882" y="182880"/>
-            <a:ext cx="6202749" cy="786384"/>
+            <a:off x="5686686" y="182880"/>
+            <a:ext cx="6227945" cy="786384"/>
           </a:xfrm>
           <a:prstGeom prst="roundRect">
             <a:avLst>
@@ -15533,7 +15533,7 @@
         </p:blipFill>
         <p:spPr>
           <a:xfrm>
-            <a:off x="5876474" y="292608"/>
+            <a:off x="5851278" y="292608"/>
             <a:ext cx="835472" cy="566928"/>
           </a:xfrm>
           <a:prstGeom prst="rect">
@@ -15557,7 +15557,7 @@
         </p:blipFill>
         <p:spPr>
           <a:xfrm>
-            <a:off x="6894827" y="292608"/>
+            <a:off x="6869630" y="292608"/>
             <a:ext cx="1598327" cy="566928"/>
           </a:xfrm>
           <a:prstGeom prst="rect">
@@ -15581,7 +15581,7 @@
         </p:blipFill>
         <p:spPr>
           <a:xfrm>
-            <a:off x="8676034" y="292608"/>
+            <a:off x="8650838" y="292608"/>
             <a:ext cx="1285036" cy="566928"/>
           </a:xfrm>
           <a:prstGeom prst="rect">
@@ -15605,8 +15605,8 @@
         </p:blipFill>
         <p:spPr>
           <a:xfrm>
-            <a:off x="10143951" y="292608"/>
-            <a:ext cx="554329" cy="566928"/>
+            <a:off x="10118754" y="292608"/>
+            <a:ext cx="579526" cy="566928"/>
           </a:xfrm>
           <a:prstGeom prst="rect">
             <a:avLst/>
@@ -15839,8 +15839,8 @@
         </p:nvSpPr>
         <p:spPr>
           <a:xfrm>
-            <a:off x="5711882" y="182880"/>
-            <a:ext cx="6202749" cy="786384"/>
+            <a:off x="5686686" y="182880"/>
+            <a:ext cx="6227945" cy="786384"/>
           </a:xfrm>
           <a:prstGeom prst="roundRect">
             <a:avLst>
@@ -15892,7 +15892,7 @@
         </p:blipFill>
         <p:spPr>
           <a:xfrm>
-            <a:off x="5876474" y="292608"/>
+            <a:off x="5851278" y="292608"/>
             <a:ext cx="835472" cy="566928"/>
           </a:xfrm>
           <a:prstGeom prst="rect">
@@ -15916,7 +15916,7 @@
         </p:blipFill>
         <p:spPr>
           <a:xfrm>
-            <a:off x="6894827" y="292608"/>
+            <a:off x="6869630" y="292608"/>
             <a:ext cx="1598327" cy="566928"/>
           </a:xfrm>
           <a:prstGeom prst="rect">
@@ -15940,7 +15940,7 @@
         </p:blipFill>
         <p:spPr>
           <a:xfrm>
-            <a:off x="8676034" y="292608"/>
+            <a:off x="8650838" y="292608"/>
             <a:ext cx="1285036" cy="566928"/>
           </a:xfrm>
           <a:prstGeom prst="rect">
@@ -15964,8 +15964,8 @@
         </p:blipFill>
         <p:spPr>
           <a:xfrm>
-            <a:off x="10143951" y="292608"/>
-            <a:ext cx="554329" cy="566928"/>
+            <a:off x="10118754" y="292608"/>
+            <a:ext cx="579526" cy="566928"/>
           </a:xfrm>
           <a:prstGeom prst="rect">
             <a:avLst/>
@@ -16339,8 +16339,8 @@
         </p:nvSpPr>
         <p:spPr>
           <a:xfrm>
-            <a:off x="5711882" y="182880"/>
-            <a:ext cx="6202749" cy="786384"/>
+            <a:off x="5686686" y="182880"/>
+            <a:ext cx="6227945" cy="786384"/>
           </a:xfrm>
           <a:prstGeom prst="roundRect">
             <a:avLst>
@@ -16392,7 +16392,7 @@
         </p:blipFill>
         <p:spPr>
           <a:xfrm>
-            <a:off x="5876474" y="292608"/>
+            <a:off x="5851278" y="292608"/>
             <a:ext cx="835472" cy="566928"/>
           </a:xfrm>
           <a:prstGeom prst="rect">
@@ -16416,7 +16416,7 @@
         </p:blipFill>
         <p:spPr>
           <a:xfrm>
-            <a:off x="6894827" y="292608"/>
+            <a:off x="6869630" y="292608"/>
             <a:ext cx="1598327" cy="566928"/>
           </a:xfrm>
           <a:prstGeom prst="rect">
@@ -16440,7 +16440,7 @@
         </p:blipFill>
         <p:spPr>
           <a:xfrm>
-            <a:off x="8676034" y="292608"/>
+            <a:off x="8650838" y="292608"/>
             <a:ext cx="1285036" cy="566928"/>
           </a:xfrm>
           <a:prstGeom prst="rect">
@@ -16464,8 +16464,8 @@
         </p:blipFill>
         <p:spPr>
           <a:xfrm>
-            <a:off x="10143951" y="292608"/>
-            <a:ext cx="554329" cy="566928"/>
+            <a:off x="10118754" y="292608"/>
+            <a:ext cx="579526" cy="566928"/>
           </a:xfrm>
           <a:prstGeom prst="rect">
             <a:avLst/>
@@ -16720,7 +16720,7 @@
         </p:blipFill>
         <p:spPr>
           <a:xfrm>
-            <a:off x="5876474" y="292608"/>
+            <a:off x="5851278" y="292608"/>
             <a:ext cx="835472" cy="566928"/>
           </a:xfrm>
           <a:prstGeom prst="rect">
@@ -16744,7 +16744,7 @@
         </p:blipFill>
         <p:spPr>
           <a:xfrm>
-            <a:off x="6894827" y="292608"/>
+            <a:off x="6869630" y="292608"/>
             <a:ext cx="1598327" cy="566928"/>
           </a:xfrm>
           <a:prstGeom prst="rect">
@@ -16768,7 +16768,7 @@
         </p:blipFill>
         <p:spPr>
           <a:xfrm>
-            <a:off x="8676034" y="292608"/>
+            <a:off x="8650838" y="292608"/>
             <a:ext cx="1285036" cy="566928"/>
           </a:xfrm>
           <a:prstGeom prst="rect">
@@ -16792,8 +16792,8 @@
         </p:blipFill>
         <p:spPr>
           <a:xfrm>
-            <a:off x="10143951" y="292608"/>
-            <a:ext cx="554329" cy="566928"/>
+            <a:off x="10118754" y="292608"/>
+            <a:ext cx="579526" cy="566928"/>
           </a:xfrm>
           <a:prstGeom prst="rect">
             <a:avLst/>
@@ -17097,8 +17097,8 @@
         </p:nvSpPr>
         <p:spPr>
           <a:xfrm>
-            <a:off x="5711882" y="182880"/>
-            <a:ext cx="6202749" cy="786384"/>
+            <a:off x="5686686" y="182880"/>
+            <a:ext cx="6227945" cy="786384"/>
           </a:xfrm>
           <a:prstGeom prst="roundRect">
             <a:avLst>
@@ -17150,7 +17150,7 @@
         </p:blipFill>
         <p:spPr>
           <a:xfrm>
-            <a:off x="5876474" y="292608"/>
+            <a:off x="5851278" y="292608"/>
             <a:ext cx="835472" cy="566928"/>
           </a:xfrm>
           <a:prstGeom prst="rect">
@@ -17174,7 +17174,7 @@
         </p:blipFill>
         <p:spPr>
           <a:xfrm>
-            <a:off x="6894827" y="292608"/>
+            <a:off x="6869630" y="292608"/>
             <a:ext cx="1598327" cy="566928"/>
           </a:xfrm>
           <a:prstGeom prst="rect">
@@ -17198,7 +17198,7 @@
         </p:blipFill>
         <p:spPr>
           <a:xfrm>
-            <a:off x="8676034" y="292608"/>
+            <a:off x="8650838" y="292608"/>
             <a:ext cx="1285036" cy="566928"/>
           </a:xfrm>
           <a:prstGeom prst="rect">
@@ -17222,8 +17222,8 @@
         </p:blipFill>
         <p:spPr>
           <a:xfrm>
-            <a:off x="10143951" y="292608"/>
-            <a:ext cx="554329" cy="566928"/>
+            <a:off x="10118754" y="292608"/>
+            <a:ext cx="579526" cy="566928"/>
           </a:xfrm>
           <a:prstGeom prst="rect">
             <a:avLst/>
@@ -17560,8 +17560,8 @@
         </p:nvSpPr>
         <p:spPr>
           <a:xfrm>
-            <a:off x="5711882" y="182880"/>
-            <a:ext cx="6202749" cy="786384"/>
+            <a:off x="5686686" y="182880"/>
+            <a:ext cx="6227945" cy="786384"/>
           </a:xfrm>
           <a:prstGeom prst="roundRect">
             <a:avLst>
@@ -17613,7 +17613,7 @@
         </p:blipFill>
         <p:spPr>
           <a:xfrm>
-            <a:off x="5876474" y="292608"/>
+            <a:off x="5851278" y="292608"/>
             <a:ext cx="835472" cy="566928"/>
           </a:xfrm>
           <a:prstGeom prst="rect">
@@ -17637,7 +17637,7 @@
         </p:blipFill>
         <p:spPr>
           <a:xfrm>
-            <a:off x="6894827" y="292608"/>
+            <a:off x="6869630" y="292608"/>
             <a:ext cx="1598327" cy="566928"/>
           </a:xfrm>
           <a:prstGeom prst="rect">
@@ -17661,7 +17661,7 @@
         </p:blipFill>
         <p:spPr>
           <a:xfrm>
-            <a:off x="8676034" y="292608"/>
+            <a:off x="8650838" y="292608"/>
             <a:ext cx="1285036" cy="566928"/>
           </a:xfrm>
           <a:prstGeom prst="rect">
@@ -17685,8 +17685,8 @@
         </p:blipFill>
         <p:spPr>
           <a:xfrm>
-            <a:off x="10143951" y="292608"/>
-            <a:ext cx="554329" cy="566928"/>
+            <a:off x="10118754" y="292608"/>
+            <a:ext cx="579526" cy="566928"/>
           </a:xfrm>
           <a:prstGeom prst="rect">
             <a:avLst/>
@@ -17943,8 +17943,8 @@
         </p:nvSpPr>
         <p:spPr>
           <a:xfrm>
-            <a:off x="5711882" y="182880"/>
-            <a:ext cx="6202749" cy="786384"/>
+            <a:off x="5686686" y="182880"/>
+            <a:ext cx="6227945" cy="786384"/>
           </a:xfrm>
           <a:prstGeom prst="roundRect">
             <a:avLst>
@@ -17996,7 +17996,7 @@
         </p:blipFill>
         <p:spPr>
           <a:xfrm>
-            <a:off x="5876474" y="292608"/>
+            <a:off x="5851278" y="292608"/>
             <a:ext cx="835472" cy="566928"/>
           </a:xfrm>
           <a:prstGeom prst="rect">
@@ -18020,7 +18020,7 @@
         </p:blipFill>
         <p:spPr>
           <a:xfrm>
-            <a:off x="6894827" y="292608"/>
+            <a:off x="6869630" y="292608"/>
             <a:ext cx="1598327" cy="566928"/>
           </a:xfrm>
           <a:prstGeom prst="rect">
@@ -18044,7 +18044,7 @@
         </p:blipFill>
         <p:spPr>
           <a:xfrm>
-            <a:off x="8676034" y="292608"/>
+            <a:off x="8650838" y="292608"/>
             <a:ext cx="1285036" cy="566928"/>
           </a:xfrm>
           <a:prstGeom prst="rect">
@@ -18068,8 +18068,8 @@
         </p:blipFill>
         <p:spPr>
           <a:xfrm>
-            <a:off x="10143951" y="292608"/>
-            <a:ext cx="554329" cy="566928"/>
+            <a:off x="10118754" y="292608"/>
+            <a:ext cx="579526" cy="566928"/>
           </a:xfrm>
           <a:prstGeom prst="rect">
             <a:avLst/>
@@ -18326,8 +18326,8 @@
         </p:nvSpPr>
         <p:spPr>
           <a:xfrm>
-            <a:off x="5711882" y="182880"/>
-            <a:ext cx="6202749" cy="786384"/>
+            <a:off x="5686686" y="182880"/>
+            <a:ext cx="6227945" cy="786384"/>
           </a:xfrm>
           <a:prstGeom prst="roundRect">
             <a:avLst>
@@ -18379,7 +18379,7 @@
         </p:blipFill>
         <p:spPr>
           <a:xfrm>
-            <a:off x="5876474" y="292608"/>
+            <a:off x="5851278" y="292608"/>
             <a:ext cx="835472" cy="566928"/>
           </a:xfrm>
           <a:prstGeom prst="rect">
@@ -18403,7 +18403,7 @@
         </p:blipFill>
         <p:spPr>
           <a:xfrm>
-            <a:off x="6894827" y="292608"/>
+            <a:off x="6869630" y="292608"/>
             <a:ext cx="1598327" cy="566928"/>
           </a:xfrm>
           <a:prstGeom prst="rect">
@@ -18427,7 +18427,7 @@
         </p:blipFill>
         <p:spPr>
           <a:xfrm>
-            <a:off x="8676034" y="292608"/>
+            <a:off x="8650838" y="292608"/>
             <a:ext cx="1285036" cy="566928"/>
           </a:xfrm>
           <a:prstGeom prst="rect">
@@ -18451,8 +18451,8 @@
         </p:blipFill>
         <p:spPr>
           <a:xfrm>
-            <a:off x="10143951" y="292608"/>
-            <a:ext cx="554329" cy="566928"/>
+            <a:off x="10118754" y="292608"/>
+            <a:ext cx="579526" cy="566928"/>
           </a:xfrm>
           <a:prstGeom prst="rect">
             <a:avLst/>
@@ -18709,8 +18709,8 @@
         </p:nvSpPr>
         <p:spPr>
           <a:xfrm>
-            <a:off x="5711882" y="182880"/>
-            <a:ext cx="6202749" cy="786384"/>
+            <a:off x="5686686" y="182880"/>
+            <a:ext cx="6227945" cy="786384"/>
           </a:xfrm>
           <a:prstGeom prst="roundRect">
             <a:avLst>
@@ -18762,7 +18762,7 @@
         </p:blipFill>
         <p:spPr>
           <a:xfrm>
-            <a:off x="5876474" y="292608"/>
+            <a:off x="5851278" y="292608"/>
             <a:ext cx="835472" cy="566928"/>
           </a:xfrm>
           <a:prstGeom prst="rect">
@@ -18786,7 +18786,7 @@
         </p:blipFill>
         <p:spPr>
           <a:xfrm>
-            <a:off x="6894827" y="292608"/>
+            <a:off x="6869630" y="292608"/>
             <a:ext cx="1598327" cy="566928"/>
           </a:xfrm>
           <a:prstGeom prst="rect">
@@ -18810,7 +18810,7 @@
         </p:blipFill>
         <p:spPr>
           <a:xfrm>
-            <a:off x="8676034" y="292608"/>
+            <a:off x="8650838" y="292608"/>
             <a:ext cx="1285036" cy="566928"/>
           </a:xfrm>
           <a:prstGeom prst="rect">
@@ -18834,8 +18834,8 @@
         </p:blipFill>
         <p:spPr>
           <a:xfrm>
-            <a:off x="10143951" y="292608"/>
-            <a:ext cx="554329" cy="566928"/>
+            <a:off x="10118754" y="292608"/>
+            <a:ext cx="579526" cy="566928"/>
           </a:xfrm>
           <a:prstGeom prst="rect">
             <a:avLst/>
@@ -19068,8 +19068,8 @@
         </p:nvSpPr>
         <p:spPr>
           <a:xfrm>
-            <a:off x="5711882" y="182880"/>
-            <a:ext cx="6202749" cy="786384"/>
+            <a:off x="5686686" y="182880"/>
+            <a:ext cx="6227945" cy="786384"/>
           </a:xfrm>
           <a:prstGeom prst="roundRect">
             <a:avLst>
@@ -19121,7 +19121,7 @@
         </p:blipFill>
         <p:spPr>
           <a:xfrm>
-            <a:off x="5876474" y="292608"/>
+            <a:off x="5851278" y="292608"/>
             <a:ext cx="835472" cy="566928"/>
           </a:xfrm>
           <a:prstGeom prst="rect">
@@ -19145,7 +19145,7 @@
         </p:blipFill>
         <p:spPr>
           <a:xfrm>
-            <a:off x="6894827" y="292608"/>
+            <a:off x="6869630" y="292608"/>
             <a:ext cx="1598327" cy="566928"/>
           </a:xfrm>
           <a:prstGeom prst="rect">
@@ -19169,7 +19169,7 @@
         </p:blipFill>
         <p:spPr>
           <a:xfrm>
-            <a:off x="8676034" y="292608"/>
+            <a:off x="8650838" y="292608"/>
             <a:ext cx="1285036" cy="566928"/>
           </a:xfrm>
           <a:prstGeom prst="rect">
@@ -19193,8 +19193,8 @@
         </p:blipFill>
         <p:spPr>
           <a:xfrm>
-            <a:off x="10143951" y="292608"/>
-            <a:ext cx="554329" cy="566928"/>
+            <a:off x="10118754" y="292608"/>
+            <a:ext cx="579526" cy="566928"/>
           </a:xfrm>
           <a:prstGeom prst="rect">
             <a:avLst/>

--- a/reports/acdr2026_staff_deployment/進行シナリオ_0929/ACDR2026_進行スライド_Day2_案1007.pptx
+++ b/reports/acdr2026_staff_deployment/進行シナリオ_0929/ACDR2026_進行スライド_Day2_案1007.pptx
@@ -5875,9 +5875,54 @@
           </a:prstGeom>
         </p:spPr>
       </p:pic>
-      <p:pic>
-        <p:nvPicPr>
-          <p:cNvPr id="3" name="Logo_sg" descr="sg.png"/>
+      <p:sp>
+        <p:nvSpPr>
+          <p:cNvPr id="3" name="LogoStrip"/>
+          <p:cNvSpPr/>
+          <p:nvPr/>
+        </p:nvSpPr>
+        <p:spPr>
+          <a:xfrm>
+            <a:off x="5829346" y="182880"/>
+            <a:ext cx="6085285" cy="786384"/>
+          </a:xfrm>
+          <a:prstGeom prst="roundRect">
+            <a:avLst>
+              <a:gd name="adj" fmla="val 18000"/>
+            </a:avLst>
+          </a:prstGeom>
+          <a:solidFill>
+            <a:srgbClr val="FFFFFF"/>
+          </a:solidFill>
+          <a:ln>
+            <a:noFill/>
+          </a:ln>
+        </p:spPr>
+        <p:style>
+          <a:lnRef idx="1">
+            <a:schemeClr val="accent1"/>
+          </a:lnRef>
+          <a:fillRef idx="3">
+            <a:schemeClr val="accent1"/>
+          </a:fillRef>
+          <a:effectRef idx="2">
+            <a:schemeClr val="accent1"/>
+          </a:effectRef>
+          <a:fontRef idx="minor">
+            <a:schemeClr val="lt1"/>
+          </a:fontRef>
+        </p:style>
+        <p:txBody>
+          <a:bodyPr rtlCol="0" anchor="ctr"/>
+          <a:lstStyle/>
+          <a:p>
+            <a:pPr algn="ctr"/>
+          </a:p>
+        </p:txBody>
+      </p:sp>
+      <p:pic>
+        <p:nvPicPr>
+          <p:cNvPr id="4" name="Logo_sg" descr="sg.png"/>
           <p:cNvPicPr>
             <a:picLocks noChangeAspect="1"/>
           </p:cNvPicPr>
@@ -5891,7 +5936,7 @@
         </p:blipFill>
         <p:spPr>
           <a:xfrm>
-            <a:off x="5851278" y="292608"/>
+            <a:off x="5993938" y="292608"/>
             <a:ext cx="835472" cy="566928"/>
           </a:xfrm>
           <a:prstGeom prst="rect">
@@ -5901,7 +5946,7 @@
       </p:pic>
       <p:pic>
         <p:nvPicPr>
-          <p:cNvPr id="4" name="Logo_scdf" descr="scdf.png"/>
+          <p:cNvPr id="5" name="Logo_scdf" descr="scdf.png"/>
           <p:cNvPicPr>
             <a:picLocks noChangeAspect="1"/>
           </p:cNvPicPr>
@@ -5915,17 +5960,17 @@
         </p:blipFill>
         <p:spPr>
           <a:xfrm>
-            <a:off x="6869630" y="292608"/>
-            <a:ext cx="1598327" cy="566928"/>
-          </a:xfrm>
-          <a:prstGeom prst="rect">
-            <a:avLst/>
-          </a:prstGeom>
-        </p:spPr>
-      </p:pic>
-      <p:pic>
-        <p:nvPicPr>
-          <p:cNvPr id="5" name="Logo_cosem" descr="cosem.png"/>
+            <a:off x="7012291" y="292608"/>
+            <a:ext cx="1646830" cy="566928"/>
+          </a:xfrm>
+          <a:prstGeom prst="rect">
+            <a:avLst/>
+          </a:prstGeom>
+        </p:spPr>
+      </p:pic>
+      <p:pic>
+        <p:nvPicPr>
+          <p:cNvPr id="6" name="Logo_cosem" descr="cosem.png"/>
           <p:cNvPicPr>
             <a:picLocks noChangeAspect="1"/>
           </p:cNvPicPr>
@@ -5939,17 +5984,17 @@
         </p:blipFill>
         <p:spPr>
           <a:xfrm>
-            <a:off x="8650838" y="292608"/>
-            <a:ext cx="1285036" cy="566928"/>
-          </a:xfrm>
-          <a:prstGeom prst="rect">
-            <a:avLst/>
-          </a:prstGeom>
-        </p:spPr>
-      </p:pic>
-      <p:pic>
-        <p:nvPicPr>
-          <p:cNvPr id="6" name="Logo_adrc" descr="adrc.png"/>
+            <a:off x="8842002" y="292608"/>
+            <a:ext cx="1093872" cy="566928"/>
+          </a:xfrm>
+          <a:prstGeom prst="rect">
+            <a:avLst/>
+          </a:prstGeom>
+        </p:spPr>
+      </p:pic>
+      <p:pic>
+        <p:nvPicPr>
+          <p:cNvPr id="7" name="Logo_adrc" descr="adrc.png"/>
           <p:cNvPicPr>
             <a:picLocks noChangeAspect="1"/>
           </p:cNvPicPr>
@@ -5973,7 +6018,7 @@
       </p:pic>
       <p:pic>
         <p:nvPicPr>
-          <p:cNvPr id="7" name="Logo_jp" descr="jp.png"/>
+          <p:cNvPr id="8" name="Logo_jp" descr="jp.png"/>
           <p:cNvPicPr>
             <a:picLocks noChangeAspect="1"/>
           </p:cNvPicPr>
@@ -5997,7 +6042,7 @@
       </p:pic>
       <p:sp>
         <p:nvSpPr>
-          <p:cNvPr id="8" name="TextBox 7"/>
+          <p:cNvPr id="9" name="TextBox 8"/>
           <p:cNvSpPr txBox="1"/>
           <p:nvPr/>
         </p:nvSpPr>
@@ -6044,7 +6089,7 @@
       </p:sp>
       <p:sp>
         <p:nvSpPr>
-          <p:cNvPr id="9" name="TextBox 8"/>
+          <p:cNvPr id="10" name="TextBox 9"/>
           <p:cNvSpPr txBox="1"/>
           <p:nvPr/>
         </p:nvSpPr>
@@ -6091,7 +6136,7 @@
       </p:sp>
       <p:sp>
         <p:nvSpPr>
-          <p:cNvPr id="10" name="TextBox 9"/>
+          <p:cNvPr id="11" name="TextBox 10"/>
           <p:cNvSpPr txBox="1"/>
           <p:nvPr/>
         </p:nvSpPr>
@@ -6138,7 +6183,7 @@
       </p:sp>
       <p:sp>
         <p:nvSpPr>
-          <p:cNvPr id="11" name="TextBox 10"/>
+          <p:cNvPr id="12" name="TextBox 11"/>
           <p:cNvSpPr txBox="1"/>
           <p:nvPr/>
         </p:nvSpPr>
@@ -6327,8 +6372,8 @@
         </p:nvSpPr>
         <p:spPr>
           <a:xfrm>
-            <a:off x="5686686" y="182880"/>
-            <a:ext cx="6227945" cy="786384"/>
+            <a:off x="5829346" y="182880"/>
+            <a:ext cx="6085285" cy="786384"/>
           </a:xfrm>
           <a:prstGeom prst="roundRect">
             <a:avLst>
@@ -6380,7 +6425,7 @@
         </p:blipFill>
         <p:spPr>
           <a:xfrm>
-            <a:off x="5851278" y="292608"/>
+            <a:off x="5993938" y="292608"/>
             <a:ext cx="835472" cy="566928"/>
           </a:xfrm>
           <a:prstGeom prst="rect">
@@ -6404,8 +6449,8 @@
         </p:blipFill>
         <p:spPr>
           <a:xfrm>
-            <a:off x="6869630" y="292608"/>
-            <a:ext cx="1598327" cy="566928"/>
+            <a:off x="7012291" y="292608"/>
+            <a:ext cx="1646830" cy="566928"/>
           </a:xfrm>
           <a:prstGeom prst="rect">
             <a:avLst/>
@@ -6428,8 +6473,8 @@
         </p:blipFill>
         <p:spPr>
           <a:xfrm>
-            <a:off x="8650838" y="292608"/>
-            <a:ext cx="1285036" cy="566928"/>
+            <a:off x="8842002" y="292608"/>
+            <a:ext cx="1093872" cy="566928"/>
           </a:xfrm>
           <a:prstGeom prst="rect">
             <a:avLst/>
@@ -6686,8 +6731,8 @@
         </p:nvSpPr>
         <p:spPr>
           <a:xfrm>
-            <a:off x="5686686" y="182880"/>
-            <a:ext cx="6227945" cy="786384"/>
+            <a:off x="5829346" y="182880"/>
+            <a:ext cx="6085285" cy="786384"/>
           </a:xfrm>
           <a:prstGeom prst="roundRect">
             <a:avLst>
@@ -6739,7 +6784,7 @@
         </p:blipFill>
         <p:spPr>
           <a:xfrm>
-            <a:off x="5851278" y="292608"/>
+            <a:off x="5993938" y="292608"/>
             <a:ext cx="835472" cy="566928"/>
           </a:xfrm>
           <a:prstGeom prst="rect">
@@ -6763,8 +6808,8 @@
         </p:blipFill>
         <p:spPr>
           <a:xfrm>
-            <a:off x="6869630" y="292608"/>
-            <a:ext cx="1598327" cy="566928"/>
+            <a:off x="7012291" y="292608"/>
+            <a:ext cx="1646830" cy="566928"/>
           </a:xfrm>
           <a:prstGeom prst="rect">
             <a:avLst/>
@@ -6787,8 +6832,8 @@
         </p:blipFill>
         <p:spPr>
           <a:xfrm>
-            <a:off x="8650838" y="292608"/>
-            <a:ext cx="1285036" cy="566928"/>
+            <a:off x="8842002" y="292608"/>
+            <a:ext cx="1093872" cy="566928"/>
           </a:xfrm>
           <a:prstGeom prst="rect">
             <a:avLst/>
@@ -7045,8 +7090,8 @@
         </p:nvSpPr>
         <p:spPr>
           <a:xfrm>
-            <a:off x="5686686" y="182880"/>
-            <a:ext cx="6227945" cy="786384"/>
+            <a:off x="5829346" y="182880"/>
+            <a:ext cx="6085285" cy="786384"/>
           </a:xfrm>
           <a:prstGeom prst="roundRect">
             <a:avLst>
@@ -7098,7 +7143,7 @@
         </p:blipFill>
         <p:spPr>
           <a:xfrm>
-            <a:off x="5851278" y="292608"/>
+            <a:off x="5993938" y="292608"/>
             <a:ext cx="835472" cy="566928"/>
           </a:xfrm>
           <a:prstGeom prst="rect">
@@ -7122,8 +7167,8 @@
         </p:blipFill>
         <p:spPr>
           <a:xfrm>
-            <a:off x="6869630" y="292608"/>
-            <a:ext cx="1598327" cy="566928"/>
+            <a:off x="7012291" y="292608"/>
+            <a:ext cx="1646830" cy="566928"/>
           </a:xfrm>
           <a:prstGeom prst="rect">
             <a:avLst/>
@@ -7146,8 +7191,8 @@
         </p:blipFill>
         <p:spPr>
           <a:xfrm>
-            <a:off x="8650838" y="292608"/>
-            <a:ext cx="1285036" cy="566928"/>
+            <a:off x="8842002" y="292608"/>
+            <a:ext cx="1093872" cy="566928"/>
           </a:xfrm>
           <a:prstGeom prst="rect">
             <a:avLst/>
@@ -7404,8 +7449,8 @@
         </p:nvSpPr>
         <p:spPr>
           <a:xfrm>
-            <a:off x="5686686" y="182880"/>
-            <a:ext cx="6227945" cy="786384"/>
+            <a:off x="5829346" y="182880"/>
+            <a:ext cx="6085285" cy="786384"/>
           </a:xfrm>
           <a:prstGeom prst="roundRect">
             <a:avLst>
@@ -7457,7 +7502,7 @@
         </p:blipFill>
         <p:spPr>
           <a:xfrm>
-            <a:off x="5851278" y="292608"/>
+            <a:off x="5993938" y="292608"/>
             <a:ext cx="835472" cy="566928"/>
           </a:xfrm>
           <a:prstGeom prst="rect">
@@ -7481,8 +7526,8 @@
         </p:blipFill>
         <p:spPr>
           <a:xfrm>
-            <a:off x="6869630" y="292608"/>
-            <a:ext cx="1598327" cy="566928"/>
+            <a:off x="7012291" y="292608"/>
+            <a:ext cx="1646830" cy="566928"/>
           </a:xfrm>
           <a:prstGeom prst="rect">
             <a:avLst/>
@@ -7505,8 +7550,8 @@
         </p:blipFill>
         <p:spPr>
           <a:xfrm>
-            <a:off x="8650838" y="292608"/>
-            <a:ext cx="1285036" cy="566928"/>
+            <a:off x="8842002" y="292608"/>
+            <a:ext cx="1093872" cy="566928"/>
           </a:xfrm>
           <a:prstGeom prst="rect">
             <a:avLst/>
@@ -7775,8 +7820,8 @@
         </p:nvSpPr>
         <p:spPr>
           <a:xfrm>
-            <a:off x="5686686" y="182880"/>
-            <a:ext cx="6227945" cy="786384"/>
+            <a:off x="5829346" y="182880"/>
+            <a:ext cx="6085285" cy="786384"/>
           </a:xfrm>
           <a:prstGeom prst="roundRect">
             <a:avLst>
@@ -7828,7 +7873,7 @@
         </p:blipFill>
         <p:spPr>
           <a:xfrm>
-            <a:off x="5851278" y="292608"/>
+            <a:off x="5993938" y="292608"/>
             <a:ext cx="835472" cy="566928"/>
           </a:xfrm>
           <a:prstGeom prst="rect">
@@ -7852,8 +7897,8 @@
         </p:blipFill>
         <p:spPr>
           <a:xfrm>
-            <a:off x="6869630" y="292608"/>
-            <a:ext cx="1598327" cy="566928"/>
+            <a:off x="7012291" y="292608"/>
+            <a:ext cx="1646830" cy="566928"/>
           </a:xfrm>
           <a:prstGeom prst="rect">
             <a:avLst/>
@@ -7876,8 +7921,8 @@
         </p:blipFill>
         <p:spPr>
           <a:xfrm>
-            <a:off x="8650838" y="292608"/>
-            <a:ext cx="1285036" cy="566928"/>
+            <a:off x="8842002" y="292608"/>
+            <a:ext cx="1093872" cy="566928"/>
           </a:xfrm>
           <a:prstGeom prst="rect">
             <a:avLst/>
@@ -8313,8 +8358,8 @@
         </p:nvSpPr>
         <p:spPr>
           <a:xfrm>
-            <a:off x="5686686" y="182880"/>
-            <a:ext cx="6227945" cy="786384"/>
+            <a:off x="5829346" y="182880"/>
+            <a:ext cx="6085285" cy="786384"/>
           </a:xfrm>
           <a:prstGeom prst="roundRect">
             <a:avLst>
@@ -8366,7 +8411,7 @@
         </p:blipFill>
         <p:spPr>
           <a:xfrm>
-            <a:off x="5851278" y="292608"/>
+            <a:off x="5993938" y="292608"/>
             <a:ext cx="835472" cy="566928"/>
           </a:xfrm>
           <a:prstGeom prst="rect">
@@ -8390,8 +8435,8 @@
         </p:blipFill>
         <p:spPr>
           <a:xfrm>
-            <a:off x="6869630" y="292608"/>
-            <a:ext cx="1598327" cy="566928"/>
+            <a:off x="7012291" y="292608"/>
+            <a:ext cx="1646830" cy="566928"/>
           </a:xfrm>
           <a:prstGeom prst="rect">
             <a:avLst/>
@@ -8414,8 +8459,8 @@
         </p:blipFill>
         <p:spPr>
           <a:xfrm>
-            <a:off x="8650838" y="292608"/>
-            <a:ext cx="1285036" cy="566928"/>
+            <a:off x="8842002" y="292608"/>
+            <a:ext cx="1093872" cy="566928"/>
           </a:xfrm>
           <a:prstGeom prst="rect">
             <a:avLst/>
@@ -8707,8 +8752,8 @@
         </p:nvSpPr>
         <p:spPr>
           <a:xfrm>
-            <a:off x="5686686" y="182880"/>
-            <a:ext cx="6227945" cy="786384"/>
+            <a:off x="5829346" y="182880"/>
+            <a:ext cx="6085285" cy="786384"/>
           </a:xfrm>
           <a:prstGeom prst="roundRect">
             <a:avLst>
@@ -8760,7 +8805,7 @@
         </p:blipFill>
         <p:spPr>
           <a:xfrm>
-            <a:off x="5851278" y="292608"/>
+            <a:off x="5993938" y="292608"/>
             <a:ext cx="835472" cy="566928"/>
           </a:xfrm>
           <a:prstGeom prst="rect">
@@ -8784,8 +8829,8 @@
         </p:blipFill>
         <p:spPr>
           <a:xfrm>
-            <a:off x="6869630" y="292608"/>
-            <a:ext cx="1598327" cy="566928"/>
+            <a:off x="7012291" y="292608"/>
+            <a:ext cx="1646830" cy="566928"/>
           </a:xfrm>
           <a:prstGeom prst="rect">
             <a:avLst/>
@@ -8808,8 +8853,8 @@
         </p:blipFill>
         <p:spPr>
           <a:xfrm>
-            <a:off x="8650838" y="292608"/>
-            <a:ext cx="1285036" cy="566928"/>
+            <a:off x="8842002" y="292608"/>
+            <a:ext cx="1093872" cy="566928"/>
           </a:xfrm>
           <a:prstGeom prst="rect">
             <a:avLst/>
@@ -9101,8 +9146,8 @@
         </p:nvSpPr>
         <p:spPr>
           <a:xfrm>
-            <a:off x="5686686" y="182880"/>
-            <a:ext cx="6227945" cy="786384"/>
+            <a:off x="5829346" y="182880"/>
+            <a:ext cx="6085285" cy="786384"/>
           </a:xfrm>
           <a:prstGeom prst="roundRect">
             <a:avLst>
@@ -9154,7 +9199,7 @@
         </p:blipFill>
         <p:spPr>
           <a:xfrm>
-            <a:off x="5851278" y="292608"/>
+            <a:off x="5993938" y="292608"/>
             <a:ext cx="835472" cy="566928"/>
           </a:xfrm>
           <a:prstGeom prst="rect">
@@ -9178,8 +9223,8 @@
         </p:blipFill>
         <p:spPr>
           <a:xfrm>
-            <a:off x="6869630" y="292608"/>
-            <a:ext cx="1598327" cy="566928"/>
+            <a:off x="7012291" y="292608"/>
+            <a:ext cx="1646830" cy="566928"/>
           </a:xfrm>
           <a:prstGeom prst="rect">
             <a:avLst/>
@@ -9202,8 +9247,8 @@
         </p:blipFill>
         <p:spPr>
           <a:xfrm>
-            <a:off x="8650838" y="292608"/>
-            <a:ext cx="1285036" cy="566928"/>
+            <a:off x="8842002" y="292608"/>
+            <a:ext cx="1093872" cy="566928"/>
           </a:xfrm>
           <a:prstGeom prst="rect">
             <a:avLst/>
@@ -9507,8 +9552,8 @@
         </p:nvSpPr>
         <p:spPr>
           <a:xfrm>
-            <a:off x="5686686" y="182880"/>
-            <a:ext cx="6227945" cy="786384"/>
+            <a:off x="5829346" y="182880"/>
+            <a:ext cx="6085285" cy="786384"/>
           </a:xfrm>
           <a:prstGeom prst="roundRect">
             <a:avLst>
@@ -9560,7 +9605,7 @@
         </p:blipFill>
         <p:spPr>
           <a:xfrm>
-            <a:off x="5851278" y="292608"/>
+            <a:off x="5993938" y="292608"/>
             <a:ext cx="835472" cy="566928"/>
           </a:xfrm>
           <a:prstGeom prst="rect">
@@ -9584,8 +9629,8 @@
         </p:blipFill>
         <p:spPr>
           <a:xfrm>
-            <a:off x="6869630" y="292608"/>
-            <a:ext cx="1598327" cy="566928"/>
+            <a:off x="7012291" y="292608"/>
+            <a:ext cx="1646830" cy="566928"/>
           </a:xfrm>
           <a:prstGeom prst="rect">
             <a:avLst/>
@@ -9608,8 +9653,8 @@
         </p:blipFill>
         <p:spPr>
           <a:xfrm>
-            <a:off x="8650838" y="292608"/>
-            <a:ext cx="1285036" cy="566928"/>
+            <a:off x="8842002" y="292608"/>
+            <a:ext cx="1093872" cy="566928"/>
           </a:xfrm>
           <a:prstGeom prst="rect">
             <a:avLst/>
@@ -9913,8 +9958,8 @@
         </p:nvSpPr>
         <p:spPr>
           <a:xfrm>
-            <a:off x="5686686" y="182880"/>
-            <a:ext cx="6227945" cy="786384"/>
+            <a:off x="5829346" y="182880"/>
+            <a:ext cx="6085285" cy="786384"/>
           </a:xfrm>
           <a:prstGeom prst="roundRect">
             <a:avLst>
@@ -9966,7 +10011,7 @@
         </p:blipFill>
         <p:spPr>
           <a:xfrm>
-            <a:off x="5851278" y="292608"/>
+            <a:off x="5993938" y="292608"/>
             <a:ext cx="835472" cy="566928"/>
           </a:xfrm>
           <a:prstGeom prst="rect">
@@ -9990,8 +10035,8 @@
         </p:blipFill>
         <p:spPr>
           <a:xfrm>
-            <a:off x="6869630" y="292608"/>
-            <a:ext cx="1598327" cy="566928"/>
+            <a:off x="7012291" y="292608"/>
+            <a:ext cx="1646830" cy="566928"/>
           </a:xfrm>
           <a:prstGeom prst="rect">
             <a:avLst/>
@@ -10014,8 +10059,8 @@
         </p:blipFill>
         <p:spPr>
           <a:xfrm>
-            <a:off x="8650838" y="292608"/>
-            <a:ext cx="1285036" cy="566928"/>
+            <a:off x="8842002" y="292608"/>
+            <a:ext cx="1093872" cy="566928"/>
           </a:xfrm>
           <a:prstGeom prst="rect">
             <a:avLst/>
@@ -10319,8 +10364,8 @@
         </p:nvSpPr>
         <p:spPr>
           <a:xfrm>
-            <a:off x="5686686" y="182880"/>
-            <a:ext cx="6227945" cy="786384"/>
+            <a:off x="5829346" y="182880"/>
+            <a:ext cx="6085285" cy="786384"/>
           </a:xfrm>
           <a:prstGeom prst="roundRect">
             <a:avLst>
@@ -10372,7 +10417,7 @@
         </p:blipFill>
         <p:spPr>
           <a:xfrm>
-            <a:off x="5851278" y="292608"/>
+            <a:off x="5993938" y="292608"/>
             <a:ext cx="835472" cy="566928"/>
           </a:xfrm>
           <a:prstGeom prst="rect">
@@ -10396,8 +10441,8 @@
         </p:blipFill>
         <p:spPr>
           <a:xfrm>
-            <a:off x="6869630" y="292608"/>
-            <a:ext cx="1598327" cy="566928"/>
+            <a:off x="7012291" y="292608"/>
+            <a:ext cx="1646830" cy="566928"/>
           </a:xfrm>
           <a:prstGeom prst="rect">
             <a:avLst/>
@@ -10420,8 +10465,8 @@
         </p:blipFill>
         <p:spPr>
           <a:xfrm>
-            <a:off x="8650838" y="292608"/>
-            <a:ext cx="1285036" cy="566928"/>
+            <a:off x="8842002" y="292608"/>
+            <a:ext cx="1093872" cy="566928"/>
           </a:xfrm>
           <a:prstGeom prst="rect">
             <a:avLst/>
@@ -10863,8 +10908,8 @@
         </p:nvSpPr>
         <p:spPr>
           <a:xfrm>
-            <a:off x="5686686" y="182880"/>
-            <a:ext cx="6227945" cy="786384"/>
+            <a:off x="5829346" y="182880"/>
+            <a:ext cx="6085285" cy="786384"/>
           </a:xfrm>
           <a:prstGeom prst="roundRect">
             <a:avLst>
@@ -10916,7 +10961,7 @@
         </p:blipFill>
         <p:spPr>
           <a:xfrm>
-            <a:off x="5851278" y="292608"/>
+            <a:off x="5993938" y="292608"/>
             <a:ext cx="835472" cy="566928"/>
           </a:xfrm>
           <a:prstGeom prst="rect">
@@ -10940,8 +10985,8 @@
         </p:blipFill>
         <p:spPr>
           <a:xfrm>
-            <a:off x="6869630" y="292608"/>
-            <a:ext cx="1598327" cy="566928"/>
+            <a:off x="7012291" y="292608"/>
+            <a:ext cx="1646830" cy="566928"/>
           </a:xfrm>
           <a:prstGeom prst="rect">
             <a:avLst/>
@@ -10964,8 +11009,8 @@
         </p:blipFill>
         <p:spPr>
           <a:xfrm>
-            <a:off x="8650838" y="292608"/>
-            <a:ext cx="1285036" cy="566928"/>
+            <a:off x="8842002" y="292608"/>
+            <a:ext cx="1093872" cy="566928"/>
           </a:xfrm>
           <a:prstGeom prst="rect">
             <a:avLst/>
@@ -11257,8 +11302,8 @@
         </p:nvSpPr>
         <p:spPr>
           <a:xfrm>
-            <a:off x="5686686" y="182880"/>
-            <a:ext cx="6227945" cy="786384"/>
+            <a:off x="5829346" y="182880"/>
+            <a:ext cx="6085285" cy="786384"/>
           </a:xfrm>
           <a:prstGeom prst="roundRect">
             <a:avLst>
@@ -11310,7 +11355,7 @@
         </p:blipFill>
         <p:spPr>
           <a:xfrm>
-            <a:off x="5851278" y="292608"/>
+            <a:off x="5993938" y="292608"/>
             <a:ext cx="835472" cy="566928"/>
           </a:xfrm>
           <a:prstGeom prst="rect">
@@ -11334,8 +11379,8 @@
         </p:blipFill>
         <p:spPr>
           <a:xfrm>
-            <a:off x="6869630" y="292608"/>
-            <a:ext cx="1598327" cy="566928"/>
+            <a:off x="7012291" y="292608"/>
+            <a:ext cx="1646830" cy="566928"/>
           </a:xfrm>
           <a:prstGeom prst="rect">
             <a:avLst/>
@@ -11358,8 +11403,8 @@
         </p:blipFill>
         <p:spPr>
           <a:xfrm>
-            <a:off x="8650838" y="292608"/>
-            <a:ext cx="1285036" cy="566928"/>
+            <a:off x="8842002" y="292608"/>
+            <a:ext cx="1093872" cy="566928"/>
           </a:xfrm>
           <a:prstGeom prst="rect">
             <a:avLst/>
@@ -11640,8 +11685,8 @@
         </p:nvSpPr>
         <p:spPr>
           <a:xfrm>
-            <a:off x="5686686" y="182880"/>
-            <a:ext cx="6227945" cy="786384"/>
+            <a:off x="5829346" y="182880"/>
+            <a:ext cx="6085285" cy="786384"/>
           </a:xfrm>
           <a:prstGeom prst="roundRect">
             <a:avLst>
@@ -11693,7 +11738,7 @@
         </p:blipFill>
         <p:spPr>
           <a:xfrm>
-            <a:off x="5851278" y="292608"/>
+            <a:off x="5993938" y="292608"/>
             <a:ext cx="835472" cy="566928"/>
           </a:xfrm>
           <a:prstGeom prst="rect">
@@ -11717,8 +11762,8 @@
         </p:blipFill>
         <p:spPr>
           <a:xfrm>
-            <a:off x="6869630" y="292608"/>
-            <a:ext cx="1598327" cy="566928"/>
+            <a:off x="7012291" y="292608"/>
+            <a:ext cx="1646830" cy="566928"/>
           </a:xfrm>
           <a:prstGeom prst="rect">
             <a:avLst/>
@@ -11741,8 +11786,8 @@
         </p:blipFill>
         <p:spPr>
           <a:xfrm>
-            <a:off x="8650838" y="292608"/>
-            <a:ext cx="1285036" cy="566928"/>
+            <a:off x="8842002" y="292608"/>
+            <a:ext cx="1093872" cy="566928"/>
           </a:xfrm>
           <a:prstGeom prst="rect">
             <a:avLst/>
@@ -12034,8 +12079,8 @@
         </p:nvSpPr>
         <p:spPr>
           <a:xfrm>
-            <a:off x="5686686" y="182880"/>
-            <a:ext cx="6227945" cy="786384"/>
+            <a:off x="5829346" y="182880"/>
+            <a:ext cx="6085285" cy="786384"/>
           </a:xfrm>
           <a:prstGeom prst="roundRect">
             <a:avLst>
@@ -12087,7 +12132,7 @@
         </p:blipFill>
         <p:spPr>
           <a:xfrm>
-            <a:off x="5851278" y="292608"/>
+            <a:off x="5993938" y="292608"/>
             <a:ext cx="835472" cy="566928"/>
           </a:xfrm>
           <a:prstGeom prst="rect">
@@ -12111,8 +12156,8 @@
         </p:blipFill>
         <p:spPr>
           <a:xfrm>
-            <a:off x="6869630" y="292608"/>
-            <a:ext cx="1598327" cy="566928"/>
+            <a:off x="7012291" y="292608"/>
+            <a:ext cx="1646830" cy="566928"/>
           </a:xfrm>
           <a:prstGeom prst="rect">
             <a:avLst/>
@@ -12135,8 +12180,8 @@
         </p:blipFill>
         <p:spPr>
           <a:xfrm>
-            <a:off x="8650838" y="292608"/>
-            <a:ext cx="1285036" cy="566928"/>
+            <a:off x="8842002" y="292608"/>
+            <a:ext cx="1093872" cy="566928"/>
           </a:xfrm>
           <a:prstGeom prst="rect">
             <a:avLst/>
@@ -12428,8 +12473,8 @@
         </p:nvSpPr>
         <p:spPr>
           <a:xfrm>
-            <a:off x="5686686" y="182880"/>
-            <a:ext cx="6227945" cy="786384"/>
+            <a:off x="5829346" y="182880"/>
+            <a:ext cx="6085285" cy="786384"/>
           </a:xfrm>
           <a:prstGeom prst="roundRect">
             <a:avLst>
@@ -12481,7 +12526,7 @@
         </p:blipFill>
         <p:spPr>
           <a:xfrm>
-            <a:off x="5851278" y="292608"/>
+            <a:off x="5993938" y="292608"/>
             <a:ext cx="835472" cy="566928"/>
           </a:xfrm>
           <a:prstGeom prst="rect">
@@ -12505,8 +12550,8 @@
         </p:blipFill>
         <p:spPr>
           <a:xfrm>
-            <a:off x="6869630" y="292608"/>
-            <a:ext cx="1598327" cy="566928"/>
+            <a:off x="7012291" y="292608"/>
+            <a:ext cx="1646830" cy="566928"/>
           </a:xfrm>
           <a:prstGeom prst="rect">
             <a:avLst/>
@@ -12529,8 +12574,8 @@
         </p:blipFill>
         <p:spPr>
           <a:xfrm>
-            <a:off x="8650838" y="292608"/>
-            <a:ext cx="1285036" cy="566928"/>
+            <a:off x="8842002" y="292608"/>
+            <a:ext cx="1093872" cy="566928"/>
           </a:xfrm>
           <a:prstGeom prst="rect">
             <a:avLst/>
@@ -12822,8 +12867,8 @@
         </p:nvSpPr>
         <p:spPr>
           <a:xfrm>
-            <a:off x="5686686" y="182880"/>
-            <a:ext cx="6227945" cy="786384"/>
+            <a:off x="5829346" y="182880"/>
+            <a:ext cx="6085285" cy="786384"/>
           </a:xfrm>
           <a:prstGeom prst="roundRect">
             <a:avLst>
@@ -12875,7 +12920,7 @@
         </p:blipFill>
         <p:spPr>
           <a:xfrm>
-            <a:off x="5851278" y="292608"/>
+            <a:off x="5993938" y="292608"/>
             <a:ext cx="835472" cy="566928"/>
           </a:xfrm>
           <a:prstGeom prst="rect">
@@ -12899,8 +12944,8 @@
         </p:blipFill>
         <p:spPr>
           <a:xfrm>
-            <a:off x="6869630" y="292608"/>
-            <a:ext cx="1598327" cy="566928"/>
+            <a:off x="7012291" y="292608"/>
+            <a:ext cx="1646830" cy="566928"/>
           </a:xfrm>
           <a:prstGeom prst="rect">
             <a:avLst/>
@@ -12923,8 +12968,8 @@
         </p:blipFill>
         <p:spPr>
           <a:xfrm>
-            <a:off x="8650838" y="292608"/>
-            <a:ext cx="1285036" cy="566928"/>
+            <a:off x="8842002" y="292608"/>
+            <a:ext cx="1093872" cy="566928"/>
           </a:xfrm>
           <a:prstGeom prst="rect">
             <a:avLst/>
@@ -13193,8 +13238,8 @@
         </p:nvSpPr>
         <p:spPr>
           <a:xfrm>
-            <a:off x="5686686" y="182880"/>
-            <a:ext cx="6227945" cy="786384"/>
+            <a:off x="5829346" y="182880"/>
+            <a:ext cx="6085285" cy="786384"/>
           </a:xfrm>
           <a:prstGeom prst="roundRect">
             <a:avLst>
@@ -13246,7 +13291,7 @@
         </p:blipFill>
         <p:spPr>
           <a:xfrm>
-            <a:off x="5851278" y="292608"/>
+            <a:off x="5993938" y="292608"/>
             <a:ext cx="835472" cy="566928"/>
           </a:xfrm>
           <a:prstGeom prst="rect">
@@ -13270,8 +13315,8 @@
         </p:blipFill>
         <p:spPr>
           <a:xfrm>
-            <a:off x="6869630" y="292608"/>
-            <a:ext cx="1598327" cy="566928"/>
+            <a:off x="7012291" y="292608"/>
+            <a:ext cx="1646830" cy="566928"/>
           </a:xfrm>
           <a:prstGeom prst="rect">
             <a:avLst/>
@@ -13294,8 +13339,8 @@
         </p:blipFill>
         <p:spPr>
           <a:xfrm>
-            <a:off x="8650838" y="292608"/>
-            <a:ext cx="1285036" cy="566928"/>
+            <a:off x="8842002" y="292608"/>
+            <a:ext cx="1093872" cy="566928"/>
           </a:xfrm>
           <a:prstGeom prst="rect">
             <a:avLst/>
@@ -13462,9 +13507,54 @@
           </a:prstGeom>
         </p:spPr>
       </p:pic>
-      <p:pic>
-        <p:nvPicPr>
-          <p:cNvPr id="3" name="Logo_sg" descr="sg.png"/>
+      <p:sp>
+        <p:nvSpPr>
+          <p:cNvPr id="3" name="LogoStrip"/>
+          <p:cNvSpPr/>
+          <p:nvPr/>
+        </p:nvSpPr>
+        <p:spPr>
+          <a:xfrm>
+            <a:off x="5829346" y="182880"/>
+            <a:ext cx="6085285" cy="786384"/>
+          </a:xfrm>
+          <a:prstGeom prst="roundRect">
+            <a:avLst>
+              <a:gd name="adj" fmla="val 18000"/>
+            </a:avLst>
+          </a:prstGeom>
+          <a:solidFill>
+            <a:srgbClr val="FFFFFF"/>
+          </a:solidFill>
+          <a:ln>
+            <a:noFill/>
+          </a:ln>
+        </p:spPr>
+        <p:style>
+          <a:lnRef idx="1">
+            <a:schemeClr val="accent1"/>
+          </a:lnRef>
+          <a:fillRef idx="3">
+            <a:schemeClr val="accent1"/>
+          </a:fillRef>
+          <a:effectRef idx="2">
+            <a:schemeClr val="accent1"/>
+          </a:effectRef>
+          <a:fontRef idx="minor">
+            <a:schemeClr val="lt1"/>
+          </a:fontRef>
+        </p:style>
+        <p:txBody>
+          <a:bodyPr rtlCol="0" anchor="ctr"/>
+          <a:lstStyle/>
+          <a:p>
+            <a:pPr algn="ctr"/>
+          </a:p>
+        </p:txBody>
+      </p:sp>
+      <p:pic>
+        <p:nvPicPr>
+          <p:cNvPr id="4" name="Logo_sg" descr="sg.png"/>
           <p:cNvPicPr>
             <a:picLocks noChangeAspect="1"/>
           </p:cNvPicPr>
@@ -13478,7 +13568,7 @@
         </p:blipFill>
         <p:spPr>
           <a:xfrm>
-            <a:off x="5851278" y="292608"/>
+            <a:off x="5993938" y="292608"/>
             <a:ext cx="835472" cy="566928"/>
           </a:xfrm>
           <a:prstGeom prst="rect">
@@ -13488,7 +13578,7 @@
       </p:pic>
       <p:pic>
         <p:nvPicPr>
-          <p:cNvPr id="4" name="Logo_scdf" descr="scdf.png"/>
+          <p:cNvPr id="5" name="Logo_scdf" descr="scdf.png"/>
           <p:cNvPicPr>
             <a:picLocks noChangeAspect="1"/>
           </p:cNvPicPr>
@@ -13502,17 +13592,17 @@
         </p:blipFill>
         <p:spPr>
           <a:xfrm>
-            <a:off x="6869630" y="292608"/>
-            <a:ext cx="1598327" cy="566928"/>
-          </a:xfrm>
-          <a:prstGeom prst="rect">
-            <a:avLst/>
-          </a:prstGeom>
-        </p:spPr>
-      </p:pic>
-      <p:pic>
-        <p:nvPicPr>
-          <p:cNvPr id="5" name="Logo_cosem" descr="cosem.png"/>
+            <a:off x="7012291" y="292608"/>
+            <a:ext cx="1646830" cy="566928"/>
+          </a:xfrm>
+          <a:prstGeom prst="rect">
+            <a:avLst/>
+          </a:prstGeom>
+        </p:spPr>
+      </p:pic>
+      <p:pic>
+        <p:nvPicPr>
+          <p:cNvPr id="6" name="Logo_cosem" descr="cosem.png"/>
           <p:cNvPicPr>
             <a:picLocks noChangeAspect="1"/>
           </p:cNvPicPr>
@@ -13526,17 +13616,17 @@
         </p:blipFill>
         <p:spPr>
           <a:xfrm>
-            <a:off x="8650838" y="292608"/>
-            <a:ext cx="1285036" cy="566928"/>
-          </a:xfrm>
-          <a:prstGeom prst="rect">
-            <a:avLst/>
-          </a:prstGeom>
-        </p:spPr>
-      </p:pic>
-      <p:pic>
-        <p:nvPicPr>
-          <p:cNvPr id="6" name="Logo_adrc" descr="adrc.png"/>
+            <a:off x="8842002" y="292608"/>
+            <a:ext cx="1093872" cy="566928"/>
+          </a:xfrm>
+          <a:prstGeom prst="rect">
+            <a:avLst/>
+          </a:prstGeom>
+        </p:spPr>
+      </p:pic>
+      <p:pic>
+        <p:nvPicPr>
+          <p:cNvPr id="7" name="Logo_adrc" descr="adrc.png"/>
           <p:cNvPicPr>
             <a:picLocks noChangeAspect="1"/>
           </p:cNvPicPr>
@@ -13560,7 +13650,7 @@
       </p:pic>
       <p:pic>
         <p:nvPicPr>
-          <p:cNvPr id="7" name="Logo_jp" descr="jp.png"/>
+          <p:cNvPr id="8" name="Logo_jp" descr="jp.png"/>
           <p:cNvPicPr>
             <a:picLocks noChangeAspect="1"/>
           </p:cNvPicPr>
@@ -13584,7 +13674,7 @@
       </p:pic>
       <p:sp>
         <p:nvSpPr>
-          <p:cNvPr id="8" name="TextBox 7"/>
+          <p:cNvPr id="9" name="TextBox 8"/>
           <p:cNvSpPr txBox="1"/>
           <p:nvPr/>
         </p:nvSpPr>
@@ -13631,7 +13721,7 @@
       </p:sp>
       <p:sp>
         <p:nvSpPr>
-          <p:cNvPr id="9" name="TextBox 8"/>
+          <p:cNvPr id="10" name="TextBox 9"/>
           <p:cNvSpPr txBox="1"/>
           <p:nvPr/>
         </p:nvSpPr>
@@ -13678,7 +13768,7 @@
       </p:sp>
       <p:sp>
         <p:nvSpPr>
-          <p:cNvPr id="10" name="TextBox 9"/>
+          <p:cNvPr id="11" name="TextBox 10"/>
           <p:cNvSpPr txBox="1"/>
           <p:nvPr/>
         </p:nvSpPr>
@@ -13725,7 +13815,7 @@
       </p:sp>
       <p:sp>
         <p:nvSpPr>
-          <p:cNvPr id="11" name="TextBox 10"/>
+          <p:cNvPr id="12" name="TextBox 11"/>
           <p:cNvSpPr txBox="1"/>
           <p:nvPr/>
         </p:nvSpPr>
@@ -13914,8 +14004,8 @@
         </p:nvSpPr>
         <p:spPr>
           <a:xfrm>
-            <a:off x="5686686" y="182880"/>
-            <a:ext cx="6227945" cy="786384"/>
+            <a:off x="5829346" y="182880"/>
+            <a:ext cx="6085285" cy="786384"/>
           </a:xfrm>
           <a:prstGeom prst="roundRect">
             <a:avLst>
@@ -13967,7 +14057,7 @@
         </p:blipFill>
         <p:spPr>
           <a:xfrm>
-            <a:off x="5851278" y="292608"/>
+            <a:off x="5993938" y="292608"/>
             <a:ext cx="835472" cy="566928"/>
           </a:xfrm>
           <a:prstGeom prst="rect">
@@ -13991,8 +14081,8 @@
         </p:blipFill>
         <p:spPr>
           <a:xfrm>
-            <a:off x="6869630" y="292608"/>
-            <a:ext cx="1598327" cy="566928"/>
+            <a:off x="7012291" y="292608"/>
+            <a:ext cx="1646830" cy="566928"/>
           </a:xfrm>
           <a:prstGeom prst="rect">
             <a:avLst/>
@@ -14015,8 +14105,8 @@
         </p:blipFill>
         <p:spPr>
           <a:xfrm>
-            <a:off x="8650838" y="292608"/>
-            <a:ext cx="1285036" cy="566928"/>
+            <a:off x="8842002" y="292608"/>
+            <a:ext cx="1093872" cy="566928"/>
           </a:xfrm>
           <a:prstGeom prst="rect">
             <a:avLst/>
@@ -14297,8 +14387,8 @@
         </p:nvSpPr>
         <p:spPr>
           <a:xfrm>
-            <a:off x="5686686" y="182880"/>
-            <a:ext cx="6227945" cy="786384"/>
+            <a:off x="5829346" y="182880"/>
+            <a:ext cx="6085285" cy="786384"/>
           </a:xfrm>
           <a:prstGeom prst="roundRect">
             <a:avLst>
@@ -14350,7 +14440,7 @@
         </p:blipFill>
         <p:spPr>
           <a:xfrm>
-            <a:off x="5851278" y="292608"/>
+            <a:off x="5993938" y="292608"/>
             <a:ext cx="835472" cy="566928"/>
           </a:xfrm>
           <a:prstGeom prst="rect">
@@ -14374,8 +14464,8 @@
         </p:blipFill>
         <p:spPr>
           <a:xfrm>
-            <a:off x="6869630" y="292608"/>
-            <a:ext cx="1598327" cy="566928"/>
+            <a:off x="7012291" y="292608"/>
+            <a:ext cx="1646830" cy="566928"/>
           </a:xfrm>
           <a:prstGeom prst="rect">
             <a:avLst/>
@@ -14398,8 +14488,8 @@
         </p:blipFill>
         <p:spPr>
           <a:xfrm>
-            <a:off x="8650838" y="292608"/>
-            <a:ext cx="1285036" cy="566928"/>
+            <a:off x="8842002" y="292608"/>
+            <a:ext cx="1093872" cy="566928"/>
           </a:xfrm>
           <a:prstGeom prst="rect">
             <a:avLst/>
@@ -14703,8 +14793,8 @@
         </p:nvSpPr>
         <p:spPr>
           <a:xfrm>
-            <a:off x="5686686" y="182880"/>
-            <a:ext cx="6227945" cy="786384"/>
+            <a:off x="5829346" y="182880"/>
+            <a:ext cx="6085285" cy="786384"/>
           </a:xfrm>
           <a:prstGeom prst="roundRect">
             <a:avLst>
@@ -14756,7 +14846,7 @@
         </p:blipFill>
         <p:spPr>
           <a:xfrm>
-            <a:off x="5851278" y="292608"/>
+            <a:off x="5993938" y="292608"/>
             <a:ext cx="835472" cy="566928"/>
           </a:xfrm>
           <a:prstGeom prst="rect">
@@ -14780,8 +14870,8 @@
         </p:blipFill>
         <p:spPr>
           <a:xfrm>
-            <a:off x="6869630" y="292608"/>
-            <a:ext cx="1598327" cy="566928"/>
+            <a:off x="7012291" y="292608"/>
+            <a:ext cx="1646830" cy="566928"/>
           </a:xfrm>
           <a:prstGeom prst="rect">
             <a:avLst/>
@@ -14804,8 +14894,8 @@
         </p:blipFill>
         <p:spPr>
           <a:xfrm>
-            <a:off x="8650838" y="292608"/>
-            <a:ext cx="1285036" cy="566928"/>
+            <a:off x="8842002" y="292608"/>
+            <a:ext cx="1093872" cy="566928"/>
           </a:xfrm>
           <a:prstGeom prst="rect">
             <a:avLst/>
@@ -15074,8 +15164,8 @@
         </p:nvSpPr>
         <p:spPr>
           <a:xfrm>
-            <a:off x="5686686" y="182880"/>
-            <a:ext cx="6227945" cy="786384"/>
+            <a:off x="5829346" y="182880"/>
+            <a:ext cx="6085285" cy="786384"/>
           </a:xfrm>
           <a:prstGeom prst="roundRect">
             <a:avLst>
@@ -15127,7 +15217,7 @@
         </p:blipFill>
         <p:spPr>
           <a:xfrm>
-            <a:off x="5851278" y="292608"/>
+            <a:off x="5993938" y="292608"/>
             <a:ext cx="835472" cy="566928"/>
           </a:xfrm>
           <a:prstGeom prst="rect">
@@ -15151,8 +15241,8 @@
         </p:blipFill>
         <p:spPr>
           <a:xfrm>
-            <a:off x="6869630" y="292608"/>
-            <a:ext cx="1598327" cy="566928"/>
+            <a:off x="7012291" y="292608"/>
+            <a:ext cx="1646830" cy="566928"/>
           </a:xfrm>
           <a:prstGeom prst="rect">
             <a:avLst/>
@@ -15175,8 +15265,8 @@
         </p:blipFill>
         <p:spPr>
           <a:xfrm>
-            <a:off x="8650838" y="292608"/>
-            <a:ext cx="1285036" cy="566928"/>
+            <a:off x="8842002" y="292608"/>
+            <a:ext cx="1093872" cy="566928"/>
           </a:xfrm>
           <a:prstGeom prst="rect">
             <a:avLst/>
@@ -15480,8 +15570,8 @@
         </p:nvSpPr>
         <p:spPr>
           <a:xfrm>
-            <a:off x="5686686" y="182880"/>
-            <a:ext cx="6227945" cy="786384"/>
+            <a:off x="5829346" y="182880"/>
+            <a:ext cx="6085285" cy="786384"/>
           </a:xfrm>
           <a:prstGeom prst="roundRect">
             <a:avLst>
@@ -15533,7 +15623,7 @@
         </p:blipFill>
         <p:spPr>
           <a:xfrm>
-            <a:off x="5851278" y="292608"/>
+            <a:off x="5993938" y="292608"/>
             <a:ext cx="835472" cy="566928"/>
           </a:xfrm>
           <a:prstGeom prst="rect">
@@ -15557,8 +15647,8 @@
         </p:blipFill>
         <p:spPr>
           <a:xfrm>
-            <a:off x="6869630" y="292608"/>
-            <a:ext cx="1598327" cy="566928"/>
+            <a:off x="7012291" y="292608"/>
+            <a:ext cx="1646830" cy="566928"/>
           </a:xfrm>
           <a:prstGeom prst="rect">
             <a:avLst/>
@@ -15581,8 +15671,8 @@
         </p:blipFill>
         <p:spPr>
           <a:xfrm>
-            <a:off x="8650838" y="292608"/>
-            <a:ext cx="1285036" cy="566928"/>
+            <a:off x="8842002" y="292608"/>
+            <a:ext cx="1093872" cy="566928"/>
           </a:xfrm>
           <a:prstGeom prst="rect">
             <a:avLst/>
@@ -15839,8 +15929,8 @@
         </p:nvSpPr>
         <p:spPr>
           <a:xfrm>
-            <a:off x="5686686" y="182880"/>
-            <a:ext cx="6227945" cy="786384"/>
+            <a:off x="5829346" y="182880"/>
+            <a:ext cx="6085285" cy="786384"/>
           </a:xfrm>
           <a:prstGeom prst="roundRect">
             <a:avLst>
@@ -15892,7 +15982,7 @@
         </p:blipFill>
         <p:spPr>
           <a:xfrm>
-            <a:off x="5851278" y="292608"/>
+            <a:off x="5993938" y="292608"/>
             <a:ext cx="835472" cy="566928"/>
           </a:xfrm>
           <a:prstGeom prst="rect">
@@ -15916,8 +16006,8 @@
         </p:blipFill>
         <p:spPr>
           <a:xfrm>
-            <a:off x="6869630" y="292608"/>
-            <a:ext cx="1598327" cy="566928"/>
+            <a:off x="7012291" y="292608"/>
+            <a:ext cx="1646830" cy="566928"/>
           </a:xfrm>
           <a:prstGeom prst="rect">
             <a:avLst/>
@@ -15940,8 +16030,8 @@
         </p:blipFill>
         <p:spPr>
           <a:xfrm>
-            <a:off x="8650838" y="292608"/>
-            <a:ext cx="1285036" cy="566928"/>
+            <a:off x="8842002" y="292608"/>
+            <a:ext cx="1093872" cy="566928"/>
           </a:xfrm>
           <a:prstGeom prst="rect">
             <a:avLst/>
@@ -16339,8 +16429,8 @@
         </p:nvSpPr>
         <p:spPr>
           <a:xfrm>
-            <a:off x="5686686" y="182880"/>
-            <a:ext cx="6227945" cy="786384"/>
+            <a:off x="5829346" y="182880"/>
+            <a:ext cx="6085285" cy="786384"/>
           </a:xfrm>
           <a:prstGeom prst="roundRect">
             <a:avLst>
@@ -16392,7 +16482,7 @@
         </p:blipFill>
         <p:spPr>
           <a:xfrm>
-            <a:off x="5851278" y="292608"/>
+            <a:off x="5993938" y="292608"/>
             <a:ext cx="835472" cy="566928"/>
           </a:xfrm>
           <a:prstGeom prst="rect">
@@ -16416,8 +16506,8 @@
         </p:blipFill>
         <p:spPr>
           <a:xfrm>
-            <a:off x="6869630" y="292608"/>
-            <a:ext cx="1598327" cy="566928"/>
+            <a:off x="7012291" y="292608"/>
+            <a:ext cx="1646830" cy="566928"/>
           </a:xfrm>
           <a:prstGeom prst="rect">
             <a:avLst/>
@@ -16440,8 +16530,8 @@
         </p:blipFill>
         <p:spPr>
           <a:xfrm>
-            <a:off x="8650838" y="292608"/>
-            <a:ext cx="1285036" cy="566928"/>
+            <a:off x="8842002" y="292608"/>
+            <a:ext cx="1093872" cy="566928"/>
           </a:xfrm>
           <a:prstGeom prst="rect">
             <a:avLst/>
@@ -16704,9 +16794,54 @@
           </a:prstGeom>
         </p:spPr>
       </p:pic>
-      <p:pic>
-        <p:nvPicPr>
-          <p:cNvPr id="3" name="Logo_sg" descr="sg.png"/>
+      <p:sp>
+        <p:nvSpPr>
+          <p:cNvPr id="3" name="LogoStrip"/>
+          <p:cNvSpPr/>
+          <p:nvPr/>
+        </p:nvSpPr>
+        <p:spPr>
+          <a:xfrm>
+            <a:off x="5829346" y="182880"/>
+            <a:ext cx="6085285" cy="786384"/>
+          </a:xfrm>
+          <a:prstGeom prst="roundRect">
+            <a:avLst>
+              <a:gd name="adj" fmla="val 18000"/>
+            </a:avLst>
+          </a:prstGeom>
+          <a:solidFill>
+            <a:srgbClr val="FFFFFF"/>
+          </a:solidFill>
+          <a:ln>
+            <a:noFill/>
+          </a:ln>
+        </p:spPr>
+        <p:style>
+          <a:lnRef idx="1">
+            <a:schemeClr val="accent1"/>
+          </a:lnRef>
+          <a:fillRef idx="3">
+            <a:schemeClr val="accent1"/>
+          </a:fillRef>
+          <a:effectRef idx="2">
+            <a:schemeClr val="accent1"/>
+          </a:effectRef>
+          <a:fontRef idx="minor">
+            <a:schemeClr val="lt1"/>
+          </a:fontRef>
+        </p:style>
+        <p:txBody>
+          <a:bodyPr rtlCol="0" anchor="ctr"/>
+          <a:lstStyle/>
+          <a:p>
+            <a:pPr algn="ctr"/>
+          </a:p>
+        </p:txBody>
+      </p:sp>
+      <p:pic>
+        <p:nvPicPr>
+          <p:cNvPr id="4" name="Logo_sg" descr="sg.png"/>
           <p:cNvPicPr>
             <a:picLocks noChangeAspect="1"/>
           </p:cNvPicPr>
@@ -16720,7 +16855,7 @@
         </p:blipFill>
         <p:spPr>
           <a:xfrm>
-            <a:off x="5851278" y="292608"/>
+            <a:off x="5993938" y="292608"/>
             <a:ext cx="835472" cy="566928"/>
           </a:xfrm>
           <a:prstGeom prst="rect">
@@ -16730,7 +16865,7 @@
       </p:pic>
       <p:pic>
         <p:nvPicPr>
-          <p:cNvPr id="4" name="Logo_scdf" descr="scdf.png"/>
+          <p:cNvPr id="5" name="Logo_scdf" descr="scdf.png"/>
           <p:cNvPicPr>
             <a:picLocks noChangeAspect="1"/>
           </p:cNvPicPr>
@@ -16744,17 +16879,17 @@
         </p:blipFill>
         <p:spPr>
           <a:xfrm>
-            <a:off x="6869630" y="292608"/>
-            <a:ext cx="1598327" cy="566928"/>
-          </a:xfrm>
-          <a:prstGeom prst="rect">
-            <a:avLst/>
-          </a:prstGeom>
-        </p:spPr>
-      </p:pic>
-      <p:pic>
-        <p:nvPicPr>
-          <p:cNvPr id="5" name="Logo_cosem" descr="cosem.png"/>
+            <a:off x="7012291" y="292608"/>
+            <a:ext cx="1646830" cy="566928"/>
+          </a:xfrm>
+          <a:prstGeom prst="rect">
+            <a:avLst/>
+          </a:prstGeom>
+        </p:spPr>
+      </p:pic>
+      <p:pic>
+        <p:nvPicPr>
+          <p:cNvPr id="6" name="Logo_cosem" descr="cosem.png"/>
           <p:cNvPicPr>
             <a:picLocks noChangeAspect="1"/>
           </p:cNvPicPr>
@@ -16768,17 +16903,17 @@
         </p:blipFill>
         <p:spPr>
           <a:xfrm>
-            <a:off x="8650838" y="292608"/>
-            <a:ext cx="1285036" cy="566928"/>
-          </a:xfrm>
-          <a:prstGeom prst="rect">
-            <a:avLst/>
-          </a:prstGeom>
-        </p:spPr>
-      </p:pic>
-      <p:pic>
-        <p:nvPicPr>
-          <p:cNvPr id="6" name="Logo_adrc" descr="adrc.png"/>
+            <a:off x="8842002" y="292608"/>
+            <a:ext cx="1093872" cy="566928"/>
+          </a:xfrm>
+          <a:prstGeom prst="rect">
+            <a:avLst/>
+          </a:prstGeom>
+        </p:spPr>
+      </p:pic>
+      <p:pic>
+        <p:nvPicPr>
+          <p:cNvPr id="7" name="Logo_adrc" descr="adrc.png"/>
           <p:cNvPicPr>
             <a:picLocks noChangeAspect="1"/>
           </p:cNvPicPr>
@@ -16802,7 +16937,7 @@
       </p:pic>
       <p:pic>
         <p:nvPicPr>
-          <p:cNvPr id="7" name="Logo_jp" descr="jp.png"/>
+          <p:cNvPr id="8" name="Logo_jp" descr="jp.png"/>
           <p:cNvPicPr>
             <a:picLocks noChangeAspect="1"/>
           </p:cNvPicPr>
@@ -16826,7 +16961,7 @@
       </p:pic>
       <p:sp>
         <p:nvSpPr>
-          <p:cNvPr id="8" name="TextBox 7"/>
+          <p:cNvPr id="9" name="TextBox 8"/>
           <p:cNvSpPr txBox="1"/>
           <p:nvPr/>
         </p:nvSpPr>
@@ -16873,7 +17008,7 @@
       </p:sp>
       <p:sp>
         <p:nvSpPr>
-          <p:cNvPr id="9" name="TextBox 8"/>
+          <p:cNvPr id="10" name="TextBox 9"/>
           <p:cNvSpPr txBox="1"/>
           <p:nvPr/>
         </p:nvSpPr>
@@ -16920,7 +17055,7 @@
       </p:sp>
       <p:sp>
         <p:nvSpPr>
-          <p:cNvPr id="10" name="TextBox 9"/>
+          <p:cNvPr id="11" name="TextBox 10"/>
           <p:cNvSpPr txBox="1"/>
           <p:nvPr/>
         </p:nvSpPr>
@@ -17097,8 +17232,8 @@
         </p:nvSpPr>
         <p:spPr>
           <a:xfrm>
-            <a:off x="5686686" y="182880"/>
-            <a:ext cx="6227945" cy="786384"/>
+            <a:off x="5829346" y="182880"/>
+            <a:ext cx="6085285" cy="786384"/>
           </a:xfrm>
           <a:prstGeom prst="roundRect">
             <a:avLst>
@@ -17150,7 +17285,7 @@
         </p:blipFill>
         <p:spPr>
           <a:xfrm>
-            <a:off x="5851278" y="292608"/>
+            <a:off x="5993938" y="292608"/>
             <a:ext cx="835472" cy="566928"/>
           </a:xfrm>
           <a:prstGeom prst="rect">
@@ -17174,8 +17309,8 @@
         </p:blipFill>
         <p:spPr>
           <a:xfrm>
-            <a:off x="6869630" y="292608"/>
-            <a:ext cx="1598327" cy="566928"/>
+            <a:off x="7012291" y="292608"/>
+            <a:ext cx="1646830" cy="566928"/>
           </a:xfrm>
           <a:prstGeom prst="rect">
             <a:avLst/>
@@ -17198,8 +17333,8 @@
         </p:blipFill>
         <p:spPr>
           <a:xfrm>
-            <a:off x="8650838" y="292608"/>
-            <a:ext cx="1285036" cy="566928"/>
+            <a:off x="8842002" y="292608"/>
+            <a:ext cx="1093872" cy="566928"/>
           </a:xfrm>
           <a:prstGeom prst="rect">
             <a:avLst/>
@@ -17560,8 +17695,8 @@
         </p:nvSpPr>
         <p:spPr>
           <a:xfrm>
-            <a:off x="5686686" y="182880"/>
-            <a:ext cx="6227945" cy="786384"/>
+            <a:off x="5829346" y="182880"/>
+            <a:ext cx="6085285" cy="786384"/>
           </a:xfrm>
           <a:prstGeom prst="roundRect">
             <a:avLst>
@@ -17613,7 +17748,7 @@
         </p:blipFill>
         <p:spPr>
           <a:xfrm>
-            <a:off x="5851278" y="292608"/>
+            <a:off x="5993938" y="292608"/>
             <a:ext cx="835472" cy="566928"/>
           </a:xfrm>
           <a:prstGeom prst="rect">
@@ -17637,8 +17772,8 @@
         </p:blipFill>
         <p:spPr>
           <a:xfrm>
-            <a:off x="6869630" y="292608"/>
-            <a:ext cx="1598327" cy="566928"/>
+            <a:off x="7012291" y="292608"/>
+            <a:ext cx="1646830" cy="566928"/>
           </a:xfrm>
           <a:prstGeom prst="rect">
             <a:avLst/>
@@ -17661,8 +17796,8 @@
         </p:blipFill>
         <p:spPr>
           <a:xfrm>
-            <a:off x="8650838" y="292608"/>
-            <a:ext cx="1285036" cy="566928"/>
+            <a:off x="8842002" y="292608"/>
+            <a:ext cx="1093872" cy="566928"/>
           </a:xfrm>
           <a:prstGeom prst="rect">
             <a:avLst/>
@@ -17943,8 +18078,8 @@
         </p:nvSpPr>
         <p:spPr>
           <a:xfrm>
-            <a:off x="5686686" y="182880"/>
-            <a:ext cx="6227945" cy="786384"/>
+            <a:off x="5829346" y="182880"/>
+            <a:ext cx="6085285" cy="786384"/>
           </a:xfrm>
           <a:prstGeom prst="roundRect">
             <a:avLst>
@@ -17996,7 +18131,7 @@
         </p:blipFill>
         <p:spPr>
           <a:xfrm>
-            <a:off x="5851278" y="292608"/>
+            <a:off x="5993938" y="292608"/>
             <a:ext cx="835472" cy="566928"/>
           </a:xfrm>
           <a:prstGeom prst="rect">
@@ -18020,8 +18155,8 @@
         </p:blipFill>
         <p:spPr>
           <a:xfrm>
-            <a:off x="6869630" y="292608"/>
-            <a:ext cx="1598327" cy="566928"/>
+            <a:off x="7012291" y="292608"/>
+            <a:ext cx="1646830" cy="566928"/>
           </a:xfrm>
           <a:prstGeom prst="rect">
             <a:avLst/>
@@ -18044,8 +18179,8 @@
         </p:blipFill>
         <p:spPr>
           <a:xfrm>
-            <a:off x="8650838" y="292608"/>
-            <a:ext cx="1285036" cy="566928"/>
+            <a:off x="8842002" y="292608"/>
+            <a:ext cx="1093872" cy="566928"/>
           </a:xfrm>
           <a:prstGeom prst="rect">
             <a:avLst/>
@@ -18326,8 +18461,8 @@
         </p:nvSpPr>
         <p:spPr>
           <a:xfrm>
-            <a:off x="5686686" y="182880"/>
-            <a:ext cx="6227945" cy="786384"/>
+            <a:off x="5829346" y="182880"/>
+            <a:ext cx="6085285" cy="786384"/>
           </a:xfrm>
           <a:prstGeom prst="roundRect">
             <a:avLst>
@@ -18379,7 +18514,7 @@
         </p:blipFill>
         <p:spPr>
           <a:xfrm>
-            <a:off x="5851278" y="292608"/>
+            <a:off x="5993938" y="292608"/>
             <a:ext cx="835472" cy="566928"/>
           </a:xfrm>
           <a:prstGeom prst="rect">
@@ -18403,8 +18538,8 @@
         </p:blipFill>
         <p:spPr>
           <a:xfrm>
-            <a:off x="6869630" y="292608"/>
-            <a:ext cx="1598327" cy="566928"/>
+            <a:off x="7012291" y="292608"/>
+            <a:ext cx="1646830" cy="566928"/>
           </a:xfrm>
           <a:prstGeom prst="rect">
             <a:avLst/>
@@ -18427,8 +18562,8 @@
         </p:blipFill>
         <p:spPr>
           <a:xfrm>
-            <a:off x="8650838" y="292608"/>
-            <a:ext cx="1285036" cy="566928"/>
+            <a:off x="8842002" y="292608"/>
+            <a:ext cx="1093872" cy="566928"/>
           </a:xfrm>
           <a:prstGeom prst="rect">
             <a:avLst/>
@@ -18709,8 +18844,8 @@
         </p:nvSpPr>
         <p:spPr>
           <a:xfrm>
-            <a:off x="5686686" y="182880"/>
-            <a:ext cx="6227945" cy="786384"/>
+            <a:off x="5829346" y="182880"/>
+            <a:ext cx="6085285" cy="786384"/>
           </a:xfrm>
           <a:prstGeom prst="roundRect">
             <a:avLst>
@@ -18762,7 +18897,7 @@
         </p:blipFill>
         <p:spPr>
           <a:xfrm>
-            <a:off x="5851278" y="292608"/>
+            <a:off x="5993938" y="292608"/>
             <a:ext cx="835472" cy="566928"/>
           </a:xfrm>
           <a:prstGeom prst="rect">
@@ -18786,8 +18921,8 @@
         </p:blipFill>
         <p:spPr>
           <a:xfrm>
-            <a:off x="6869630" y="292608"/>
-            <a:ext cx="1598327" cy="566928"/>
+            <a:off x="7012291" y="292608"/>
+            <a:ext cx="1646830" cy="566928"/>
           </a:xfrm>
           <a:prstGeom prst="rect">
             <a:avLst/>
@@ -18810,8 +18945,8 @@
         </p:blipFill>
         <p:spPr>
           <a:xfrm>
-            <a:off x="8650838" y="292608"/>
-            <a:ext cx="1285036" cy="566928"/>
+            <a:off x="8842002" y="292608"/>
+            <a:ext cx="1093872" cy="566928"/>
           </a:xfrm>
           <a:prstGeom prst="rect">
             <a:avLst/>
@@ -19068,8 +19203,8 @@
         </p:nvSpPr>
         <p:spPr>
           <a:xfrm>
-            <a:off x="5686686" y="182880"/>
-            <a:ext cx="6227945" cy="786384"/>
+            <a:off x="5829346" y="182880"/>
+            <a:ext cx="6085285" cy="786384"/>
           </a:xfrm>
           <a:prstGeom prst="roundRect">
             <a:avLst>
@@ -19121,7 +19256,7 @@
         </p:blipFill>
         <p:spPr>
           <a:xfrm>
-            <a:off x="5851278" y="292608"/>
+            <a:off x="5993938" y="292608"/>
             <a:ext cx="835472" cy="566928"/>
           </a:xfrm>
           <a:prstGeom prst="rect">
@@ -19145,8 +19280,8 @@
         </p:blipFill>
         <p:spPr>
           <a:xfrm>
-            <a:off x="6869630" y="292608"/>
-            <a:ext cx="1598327" cy="566928"/>
+            <a:off x="7012291" y="292608"/>
+            <a:ext cx="1646830" cy="566928"/>
           </a:xfrm>
           <a:prstGeom prst="rect">
             <a:avLst/>
@@ -19169,8 +19304,8 @@
         </p:blipFill>
         <p:spPr>
           <a:xfrm>
-            <a:off x="8650838" y="292608"/>
-            <a:ext cx="1285036" cy="566928"/>
+            <a:off x="8842002" y="292608"/>
+            <a:ext cx="1093872" cy="566928"/>
           </a:xfrm>
           <a:prstGeom prst="rect">
             <a:avLst/>
